--- a/content/W01/D5/slides/C2_W01_D05_rehearsal_STUDENT.pptx
+++ b/content/W01/D5/slides/C2_W01_D05_rehearsal_STUDENT.pptx
@@ -1730,7 +1730,7 @@
           <a:lstStyle/>
           <a:p>
             <a:r>
-              <a:t>LIVE, 50 minutes. The TAs walk the room. Each TA also uses this round to tell each of their learners,</a:t>
+              <a:t>LIVE, 50 minutes, of which S1 to S4 and S6 took the first six. The TAs walk the room. Each TA also uses this round to tell each of their learners,</a:t>
             </a:r>
           </a:p>
           <a:p>
@@ -13516,7 +13516,7 @@
                 </a:solidFill>
                 <a:latin typeface="Calibri"/>
               </a:rPr>
-              <a:t>Count before rate: a rate on ten orders is a rumour with a percent sign.</a:t>
+              <a:t>Count before rate: a rate on a handful of orders is a rumour with a percent sign.</a:t>
             </a:r>
           </a:p>
         </p:txBody>
@@ -15011,7 +15011,7 @@
                 </a:solidFill>
                 <a:latin typeface="Calibri"/>
               </a:rPr>
-              <a:t>Monday's review will hear a note from somebody who rebuilt it alone this morning. That is the whole point of the day.</a:t>
+              <a:t>On Monday, Meera hears a note from someone who rebuilt every number in it alone this morning, and Marketing cannot say otherwise.</a:t>
             </a:r>
           </a:p>
         </p:txBody>
@@ -20519,7 +20519,7 @@
       </p:sp>
       <p:pic>
         <p:nvPicPr>
-          <p:cNvPr id="9" name="mermaid diagram" descr="1f646fc783aad51c.png"/>
+          <p:cNvPr id="9" name="mermaid diagram" descr="9b96086d9a4bf2a5.png"/>
           <p:cNvPicPr>
             <a:picLocks noChangeAspect="1"/>
           </p:cNvPicPr>
@@ -20533,8 +20533,8 @@
         </p:blipFill>
         <p:spPr>
           <a:xfrm>
-            <a:off x="1916753" y="1956816"/>
-            <a:ext cx="8358187" cy="1128712"/>
+            <a:off x="1759591" y="1956816"/>
+            <a:ext cx="8672512" cy="1128712"/>
           </a:xfrm>
           <a:prstGeom prst="rect">
             <a:avLst/>
@@ -20575,7 +20575,7 @@
                 </a:solidFill>
                 <a:latin typeface="Calibri"/>
               </a:rPr>
-              <a:t>Each twelve minutes runs: two minutes of the note read aloud, six of pushes and answers, four for the partner to fill the feedback card and hand it over.</a:t>
+              <a:t>In pair one each twelve minutes runs: two minutes of the note read aloud, six of pushes and answers, four for the partner to fill the feedback card. Pair two takes ten: two, five and three.</a:t>
             </a:r>
           </a:p>
         </p:txBody>

--- a/content/W01/D5/slides/C2_W01_D05_rehearsal_STUDENT.pptx
+++ b/content/W01/D5/slides/C2_W01_D05_rehearsal_STUDENT.pptx
@@ -19220,7 +19220,7 @@
       </p:sp>
       <p:pic>
         <p:nvPicPr>
-          <p:cNvPr id="9" name="mermaid diagram" descr="fa53dd226fe27555.png"/>
+          <p:cNvPr id="9" name="mermaid diagram" descr="edb506cb4fd10d47.png"/>
           <p:cNvPicPr>
             <a:picLocks noChangeAspect="1"/>
           </p:cNvPicPr>

--- a/content/W01/D5/slides/C2_W01_D05_rehearsal_STUDENT.pptx
+++ b/content/W01/D5/slides/C2_W01_D05_rehearsal_STUDENT.pptx
@@ -5974,7 +5974,7 @@
                 </a:solidFill>
                 <a:latin typeface="Calibri"/>
               </a:rPr>
-              <a:t>Week 1 Day 5: the week rebuilt alone</a:t>
+              <a:t>Week 1, Day 5. The note, defended aloud</a:t>
             </a:r>
           </a:p>
         </p:txBody>
@@ -11075,7 +11075,7 @@
                 </a:solidFill>
                 <a:latin typeface="Calibri"/>
               </a:rPr>
-              <a:t>Week 1 Day 5: the week rebuilt alone</a:t>
+              <a:t>Week 1, Day 5. The note, defended aloud</a:t>
             </a:r>
           </a:p>
         </p:txBody>
@@ -15759,7 +15759,7 @@
                 </a:solidFill>
                 <a:latin typeface="Calibri"/>
               </a:rPr>
-              <a:t>Week 1 Day 5: the week rebuilt alone</a:t>
+              <a:t>Week 1, Day 5. The note, defended aloud</a:t>
             </a:r>
           </a:p>
         </p:txBody>

--- a/content/W01/D5/slides/C2_W01_D05_rehearsal_STUDENT.pptx
+++ b/content/W01/D5/slides/C2_W01_D05_rehearsal_STUDENT.pptx
@@ -525,7 +525,7 @@
           </a:p>
           <a:p>
             <a:r>
-              <a:t>minutes), three timed analyst cases (40), and the Kahoot with Saturday's preview (20). Nothing new</a:t>
+              <a:t>minutes), three timed design cases (40), and the Kahoot with Saturday's preview (20). Nothing new</a:t>
             </a:r>
           </a:p>
           <a:p>
@@ -680,7 +680,12 @@
           </a:p>
           <a:p>
             <a:r>
-              <a:t>answers are in trainer/C2_W01_D05_timed_cases_key_TRAINER.md; read the model after the call-outs.</a:t>
+              <a:t>answers, their sizing and the real-company sources are in trainer/C2_W01_D05_timed_cases_key_TRAINER.md;</a:t>
+            </a:r>
+          </a:p>
+          <a:p>
+            <a:r>
+              <a:t>read the model after the call-outs.</a:t>
             </a:r>
           </a:p>
         </p:txBody>
@@ -750,12 +755,12 @@
           <a:lstStyle/>
           <a:p>
             <a:r>
-              <a:t>LIVE, 13 minutes. Listen for the order: profile, reconcile, then the investigation ladder. What a</a:t>
-            </a:r>
-          </a:p>
-          <a:p>
-            <a:r>
-              <a:t>strong answer skips, and says it skips, is as important as what it does.</a:t>
+              <a:t>LIVE, 13 minutes. Listen for the options sized against the two hours, for the reconciliation named</a:t>
+            </a:r>
+          </a:p>
+          <a:p>
+            <a:r>
+              <a:t>as the step never dropped, and for the fact that would switch the plan.</a:t>
             </a:r>
           </a:p>
         </p:txBody>
@@ -825,12 +830,12 @@
           <a:lstStyle/>
           <a:p>
             <a:r>
-              <a:t>LIVE, 13 minutes. Listen for the rupee reconciliation and for suspicion of the zero. A candidate who</a:t>
-            </a:r>
-          </a:p>
-          <a:p>
-            <a:r>
-              <a:t>starts by blaming Finance's number has skipped the first check.</a:t>
+              <a:t>LIVE, 13 minutes. Listen for the checks ordered by cost against what each catches, for a stopping</a:t>
+            </a:r>
+          </a:p>
+          <a:p>
+            <a:r>
+              <a:t>point, and for Finance's number treated as the reference until the bridge closes.</a:t>
             </a:r>
           </a:p>
         </p:txBody>
@@ -900,12 +905,17 @@
           <a:lstStyle/>
           <a:p>
             <a:r>
-              <a:t>LIVE, 13 minutes. Listen for the three moves from S4: restate with the denominator, bound what the</a:t>
-            </a:r>
-          </a:p>
-          <a:p>
-            <a:r>
-              <a:t>data says, offer the test and its size. Folding and overclaiming are both answers you will hear.</a:t>
+              <a:t>LIVE, 13 minutes. Listen for the three moves from S4 and a test sized in visits and days: about 300</a:t>
+            </a:r>
+          </a:p>
+          <a:p>
+            <a:r>
+              <a:t>visits each, about half a week at the current traffic. Folding and overclaiming are both answers you</a:t>
+            </a:r>
+          </a:p>
+          <a:p>
+            <a:r>
+              <a:t>will hear.</a:t>
             </a:r>
           </a:p>
         </p:txBody>
@@ -1581,6 +1591,16 @@
           <a:p>
             <a:r>
               <a:t>Marketing is doing the defender a favour, and the room should hear that before round one starts.</a:t>
+            </a:r>
+          </a:p>
+          <a:p>
+            <a:r>
+              <a:t>The first push is the sharpest: the brief answers it in full, and a TA reads Marketing's lines while</a:t>
+            </a:r>
+          </a:p>
+          <a:p>
+            <a:r>
+              <a:t>you model the answer once.</a:t>
             </a:r>
           </a:p>
         </p:txBody>
@@ -5337,7 +5357,7 @@
         <p:spPr>
           <a:xfrm>
             <a:off x="2524601" y="5248656"/>
-            <a:ext cx="1188434" cy="185166"/>
+            <a:ext cx="1602486" cy="185166"/>
           </a:xfrm>
           <a:prstGeom prst="rect">
             <a:avLst/>
@@ -5358,7 +5378,7 @@
                 </a:solidFill>
                 <a:latin typeface="Calibri"/>
               </a:rPr>
-              <a:t>Three timed cases</a:t>
+              <a:t>Three timed design cases</a:t>
             </a:r>
           </a:p>
         </p:txBody>
@@ -5371,7 +5391,7 @@
         </p:nvSpPr>
         <p:spPr>
           <a:xfrm>
-            <a:off x="3895915" y="5212080"/>
+            <a:off x="4309967" y="5212080"/>
             <a:ext cx="365760" cy="251205"/>
           </a:xfrm>
           <a:prstGeom prst="rect">
@@ -5406,7 +5426,7 @@
         </p:nvSpPr>
         <p:spPr>
           <a:xfrm>
-            <a:off x="4279963" y="5248656"/>
+            <a:off x="4694015" y="5248656"/>
             <a:ext cx="715232" cy="185166"/>
           </a:xfrm>
           <a:prstGeom prst="rect">
@@ -5739,7 +5759,7 @@
                 </a:solidFill>
                 <a:latin typeface="Georgia"/>
               </a:rPr>
-              <a:t>Three timed cases</a:t>
+              <a:t>Three timed design cases</a:t>
             </a:r>
           </a:p>
         </p:txBody>
@@ -5843,7 +5863,7 @@
         <p:spPr>
           <a:xfrm>
             <a:off x="1976815" y="5074920"/>
-            <a:ext cx="1372431" cy="310896"/>
+            <a:ext cx="1786943" cy="310896"/>
           </a:xfrm>
           <a:prstGeom prst="roundRect">
             <a:avLst>
@@ -5884,7 +5904,7 @@
                 </a:solidFill>
                 <a:latin typeface="Calibri"/>
               </a:rPr>
-              <a:t>Three timed cases</a:t>
+              <a:t>Three timed design cases</a:t>
             </a:r>
           </a:p>
         </p:txBody>
@@ -5897,7 +5917,7 @@
         </p:nvSpPr>
         <p:spPr>
           <a:xfrm>
-            <a:off x="3458975" y="5074920"/>
+            <a:off x="3873486" y="5074920"/>
             <a:ext cx="898703" cy="310896"/>
           </a:xfrm>
           <a:prstGeom prst="roundRect">
@@ -5974,7 +5994,7 @@
                 </a:solidFill>
                 <a:latin typeface="Calibri"/>
               </a:rPr>
-              <a:t>Week 1, Day 5. The note, defended aloud</a:t>
+              <a:t>Week 1 Day 5: the week rebuilt alone</a:t>
             </a:r>
           </a:p>
         </p:txBody>
@@ -6215,7 +6235,7 @@
                 </a:solidFill>
                 <a:latin typeface="Georgia"/>
               </a:rPr>
-              <a:t>How a timed case runs</a:t>
+              <a:t>How a timed design case runs</a:t>
             </a:r>
           </a:p>
         </p:txBody>
@@ -6476,7 +6496,7 @@
         <p:spPr>
           <a:xfrm>
             <a:off x="694944" y="3277870"/>
-            <a:ext cx="2316403" cy="201676"/>
+            <a:ext cx="2316403" cy="366776"/>
           </a:xfrm>
           <a:prstGeom prst="rect">
             <a:avLst/>
@@ -6497,7 +6517,7 @@
                 </a:solidFill>
                 <a:latin typeface="Calibri"/>
               </a:rPr>
-              <a:t>The case, silently, once.</a:t>
+              <a:t>The case, its options and the real company it is like.</a:t>
             </a:r>
           </a:p>
         </p:txBody>
@@ -6700,7 +6720,7 @@
                 </a:solidFill>
                 <a:latin typeface="Calibri"/>
               </a:rPr>
-              <a:t>On paper: the first move, what you skip, and why.</a:t>
+              <a:t>On paper: which option fits, sized how, and what would switch it.</a:t>
             </a:r>
           </a:p>
         </p:txBody>
@@ -7297,7 +7317,7 @@
                 </a:solidFill>
                 <a:latin typeface="Calibri"/>
               </a:rPr>
-              <a:t>A timed case is scored on the order of your moves and the reasons you give for each, long before the final number.</a:t>
+              <a:t>A design question is scored on three things said in order: the option you choose, its size in minutes, rupees or visits, and the fact that would move you to another.</a:t>
             </a:r>
           </a:p>
         </p:txBody>
@@ -7434,7 +7454,7 @@
         <p:spPr>
           <a:xfrm>
             <a:off x="1713642" y="6437376"/>
-            <a:ext cx="1056417" cy="152146"/>
+            <a:ext cx="1378457" cy="152146"/>
           </a:xfrm>
           <a:prstGeom prst="rect">
             <a:avLst/>
@@ -7455,7 +7475,7 @@
                 </a:solidFill>
                 <a:latin typeface="Calibri"/>
               </a:rPr>
-              <a:t>Three timed cases</a:t>
+              <a:t>Three timed design cases</a:t>
             </a:r>
           </a:p>
         </p:txBody>
@@ -7468,7 +7488,7 @@
         </p:nvSpPr>
         <p:spPr>
           <a:xfrm>
-            <a:off x="2861500" y="6492240"/>
+            <a:off x="3183540" y="6492240"/>
             <a:ext cx="64008" cy="64008"/>
           </a:xfrm>
           <a:prstGeom prst="ellipse">
@@ -7512,7 +7532,7 @@
         </p:nvSpPr>
         <p:spPr>
           <a:xfrm>
-            <a:off x="2971228" y="6437376"/>
+            <a:off x="3293268" y="6437376"/>
             <a:ext cx="688371" cy="152146"/>
           </a:xfrm>
           <a:prstGeom prst="rect">
@@ -7775,7 +7795,7 @@
                 </a:solidFill>
                 <a:latin typeface="Georgia"/>
               </a:rPr>
-              <a:t>Case 1: two hours and a raw export</a:t>
+              <a:t>Case 1: Meera's first read in two hours</a:t>
             </a:r>
           </a:p>
         </p:txBody>
@@ -7810,7 +7830,7 @@
                 </a:solidFill>
                 <a:latin typeface="Calibri"/>
               </a:rPr>
-              <a:t>A drop to explain, a file nobody has checked, and a deadline.</a:t>
+              <a:t>A raw export, a review on Monday, and four plans that fit the clock differently.</a:t>
             </a:r>
           </a:p>
         </p:txBody>
@@ -7824,7 +7844,7 @@
         <p:spPr>
           <a:xfrm>
             <a:off x="530352" y="1956816"/>
-            <a:ext cx="11130991" cy="1121664"/>
+            <a:ext cx="11130991" cy="1380744"/>
           </a:xfrm>
           <a:prstGeom prst="roundRect">
             <a:avLst>
@@ -7877,7 +7897,7 @@
         </p:nvSpPr>
         <p:spPr>
           <a:xfrm>
-            <a:off x="758952" y="2289048"/>
+            <a:off x="758952" y="2418588"/>
             <a:ext cx="457200" cy="457200"/>
           </a:xfrm>
           <a:prstGeom prst="ellipse">
@@ -7929,7 +7949,7 @@
         </p:blipFill>
         <p:spPr>
           <a:xfrm>
-            <a:off x="868680" y="2398776"/>
+            <a:off x="868680" y="2528316"/>
             <a:ext cx="237744" cy="237744"/>
           </a:xfrm>
           <a:prstGeom prst="rect">
@@ -7981,7 +8001,7 @@
         <p:spPr>
           <a:xfrm>
             <a:off x="1399031" y="2322576"/>
-            <a:ext cx="9987991" cy="682752"/>
+            <a:ext cx="9987991" cy="941832"/>
           </a:xfrm>
           <a:prstGeom prst="rect">
             <a:avLst/>
@@ -8001,14 +8021,14 @@
                 </a:solidFill>
                 <a:latin typeface="Calibri"/>
               </a:rPr>
-              <a:t>[F] You have two hours and a raw export; what do you do first, and what do you skip? Here the export is a food-delivery client's orders, and sales fell 15 percent last month.</a:t>
+              <a:t>[F] You have two hours and a raw export; what do you do first, and what do you skip? Here the export is Q3 from the ERP, and DMart is the likeness: it publishes a provisional quarter days before its board signs the results.</a:t>
             </a:r>
           </a:p>
         </p:txBody>
       </p:sp>
       <p:pic>
         <p:nvPicPr>
-          <p:cNvPr id="14" name="mermaid diagram" descr="5f7354f74383a151.png"/>
+          <p:cNvPr id="14" name="mermaid diagram" descr="e377a0ada08ea71f.png"/>
           <p:cNvPicPr>
             <a:picLocks noChangeAspect="1"/>
           </p:cNvPicPr>
@@ -8022,8 +8042,8 @@
         </p:blipFill>
         <p:spPr>
           <a:xfrm>
-            <a:off x="2988316" y="3243072"/>
-            <a:ext cx="6215062" cy="871537"/>
+            <a:off x="530352" y="3502152"/>
+            <a:ext cx="11130991" cy="1028477"/>
           </a:xfrm>
           <a:prstGeom prst="rect">
             <a:avLst/>
@@ -8162,7 +8182,7 @@
         <p:spPr>
           <a:xfrm>
             <a:off x="1713642" y="6437376"/>
-            <a:ext cx="1056417" cy="152146"/>
+            <a:ext cx="1378457" cy="152146"/>
           </a:xfrm>
           <a:prstGeom prst="rect">
             <a:avLst/>
@@ -8183,7 +8203,7 @@
                 </a:solidFill>
                 <a:latin typeface="Calibri"/>
               </a:rPr>
-              <a:t>Three timed cases</a:t>
+              <a:t>Three timed design cases</a:t>
             </a:r>
           </a:p>
         </p:txBody>
@@ -8196,7 +8216,7 @@
         </p:nvSpPr>
         <p:spPr>
           <a:xfrm>
-            <a:off x="2861500" y="6492240"/>
+            <a:off x="3183540" y="6492240"/>
             <a:ext cx="64008" cy="64008"/>
           </a:xfrm>
           <a:prstGeom prst="ellipse">
@@ -8240,7 +8260,7 @@
         </p:nvSpPr>
         <p:spPr>
           <a:xfrm>
-            <a:off x="2971228" y="6437376"/>
+            <a:off x="3293268" y="6437376"/>
             <a:ext cx="688371" cy="152146"/>
           </a:xfrm>
           <a:prstGeom prst="rect">
@@ -8538,7 +8558,7 @@
                 </a:solidFill>
                 <a:latin typeface="Calibri"/>
               </a:rPr>
-              <a:t>A cleaning run that reports nothing, and Finance disagreeing anyway.</a:t>
+              <a:t>The first quarter out of the migrated ERP, a pass that reports nothing, and Finance disagreeing.</a:t>
             </a:r>
           </a:p>
         </p:txBody>
@@ -8729,7 +8749,7 @@
                 </a:solidFill>
                 <a:latin typeface="Calibri"/>
               </a:rPr>
-              <a:t>[S] Walk me through how you clean and check a dataset you have never seen. Here your pass on 50,000 rows reports zero rejects, and the dashboard and Finance disagree by Rs 20 lakh.</a:t>
+              <a:t>[S] Walk me through how you clean and check a dataset you have never seen. Here four checks cost from seconds to a day, and TSB is the likeness: a migrated platform trusted before it was reconciled.</a:t>
             </a:r>
           </a:p>
         </p:txBody>
@@ -8834,7 +8854,7 @@
                 </a:solidFill>
                 <a:latin typeface="Calibri"/>
               </a:rPr>
-              <a:t>the export</a:t>
+              <a:t>illustrative</a:t>
             </a:r>
           </a:p>
         </p:txBody>
@@ -9132,7 +9152,7 @@
                 </a:solidFill>
                 <a:latin typeface="Calibri"/>
               </a:rPr>
-              <a:t>dashboard against Finance</a:t>
+              <a:t>dashboard above Finance</a:t>
             </a:r>
           </a:p>
         </p:txBody>
@@ -9313,7 +9333,7 @@
         <p:spPr>
           <a:xfrm>
             <a:off x="1713642" y="6437376"/>
-            <a:ext cx="1056417" cy="152146"/>
+            <a:ext cx="1378457" cy="152146"/>
           </a:xfrm>
           <a:prstGeom prst="rect">
             <a:avLst/>
@@ -9334,7 +9354,7 @@
                 </a:solidFill>
                 <a:latin typeface="Calibri"/>
               </a:rPr>
-              <a:t>Three timed cases</a:t>
+              <a:t>Three timed design cases</a:t>
             </a:r>
           </a:p>
         </p:txBody>
@@ -9347,7 +9367,7 @@
         </p:nvSpPr>
         <p:spPr>
           <a:xfrm>
-            <a:off x="2861500" y="6492240"/>
+            <a:off x="3183540" y="6492240"/>
             <a:ext cx="64008" cy="64008"/>
           </a:xfrm>
           <a:prstGeom prst="ellipse">
@@ -9391,7 +9411,7 @@
         </p:nvSpPr>
         <p:spPr>
           <a:xfrm>
-            <a:off x="2971228" y="6437376"/>
+            <a:off x="3293268" y="6437376"/>
             <a:ext cx="688371" cy="152146"/>
           </a:xfrm>
           <a:prstGeom prst="rect">
@@ -9689,7 +9709,7 @@
                 </a:solidFill>
                 <a:latin typeface="Calibri"/>
               </a:rPr>
-              <a:t>A product head wants to scale a result tomorrow, and your caveat is in the way.</a:t>
+              <a:t>A product head wants to ship a result tomorrow, and your caveat is in the way.</a:t>
             </a:r>
           </a:p>
         </p:txBody>
@@ -9703,7 +9723,7 @@
         <p:spPr>
           <a:xfrm>
             <a:off x="530352" y="1956816"/>
-            <a:ext cx="11130991" cy="1121664"/>
+            <a:ext cx="11130991" cy="1380744"/>
           </a:xfrm>
           <a:prstGeom prst="roundRect">
             <a:avLst>
@@ -9756,7 +9776,7 @@
         </p:nvSpPr>
         <p:spPr>
           <a:xfrm>
-            <a:off x="758952" y="2289048"/>
+            <a:off x="758952" y="2418588"/>
             <a:ext cx="457200" cy="457200"/>
           </a:xfrm>
           <a:prstGeom prst="ellipse">
@@ -9808,7 +9828,7 @@
         </p:blipFill>
         <p:spPr>
           <a:xfrm>
-            <a:off x="868680" y="2398776"/>
+            <a:off x="868680" y="2528316"/>
             <a:ext cx="237744" cy="237744"/>
           </a:xfrm>
           <a:prstGeom prst="rect">
@@ -9860,7 +9880,7 @@
         <p:spPr>
           <a:xfrm>
             <a:off x="1399031" y="2322576"/>
-            <a:ext cx="9987991" cy="682752"/>
+            <a:ext cx="9987991" cy="941832"/>
           </a:xfrm>
           <a:prstGeom prst="rect">
             <a:avLst/>
@@ -9880,7 +9900,7 @@
                 </a:solidFill>
                 <a:latin typeface="Calibri"/>
               </a:rPr>
-              <a:t>[D] A stakeholder attacks your caveat in front of the room; how do you hold it without overclaiming? Here a new checkout flow converted 42 percent on 12 visits against 31 percent on 1,200.</a:t>
+              <a:t>[D] A stakeholder attacks your caveat in front of the room; how do you hold it without overclaiming? Here a new checkout converted 42 percent on 12 visits against 31 percent on 1,200, and Bing is the likeness: a 12 percent lift checked before anyone believed it.</a:t>
             </a:r>
           </a:p>
         </p:txBody>
@@ -9893,7 +9913,7 @@
         </p:nvSpPr>
         <p:spPr>
           <a:xfrm>
-            <a:off x="530352" y="3243072"/>
+            <a:off x="530352" y="3502152"/>
             <a:ext cx="3527450" cy="698500"/>
           </a:xfrm>
           <a:prstGeom prst="rect">
@@ -9928,7 +9948,7 @@
         </p:nvSpPr>
         <p:spPr>
           <a:xfrm>
-            <a:off x="530352" y="3978148"/>
+            <a:off x="530352" y="4237228"/>
             <a:ext cx="3527450" cy="168656"/>
           </a:xfrm>
           <a:prstGeom prst="rect">
@@ -9950,7 +9970,7 @@
                 </a:solidFill>
                 <a:latin typeface="Calibri"/>
               </a:rPr>
-              <a:t>NEW FLOW</a:t>
+              <a:t>NEW CHECKOUT</a:t>
             </a:r>
           </a:p>
         </p:txBody>
@@ -9963,7 +9983,7 @@
         </p:nvSpPr>
         <p:spPr>
           <a:xfrm>
-            <a:off x="530352" y="4179316"/>
+            <a:off x="530352" y="4438396"/>
             <a:ext cx="3527450" cy="193421"/>
           </a:xfrm>
           <a:prstGeom prst="rect">
@@ -9985,7 +10005,7 @@
                 </a:solidFill>
                 <a:latin typeface="Calibri"/>
               </a:rPr>
-              <a:t>on 12 visits</a:t>
+              <a:t>5 of 12 visits</a:t>
             </a:r>
           </a:p>
         </p:txBody>
@@ -9998,7 +10018,7 @@
         </p:nvSpPr>
         <p:spPr>
           <a:xfrm>
-            <a:off x="530352" y="4431792"/>
+            <a:off x="530352" y="4690872"/>
             <a:ext cx="3527450" cy="10972"/>
           </a:xfrm>
           <a:prstGeom prst="rect">
@@ -10042,7 +10062,7 @@
         </p:nvSpPr>
         <p:spPr>
           <a:xfrm>
-            <a:off x="4332122" y="3243072"/>
+            <a:off x="4332122" y="3502152"/>
             <a:ext cx="3527450" cy="698500"/>
           </a:xfrm>
           <a:prstGeom prst="rect">
@@ -10077,7 +10097,7 @@
         </p:nvSpPr>
         <p:spPr>
           <a:xfrm>
-            <a:off x="4332122" y="3978148"/>
+            <a:off x="4332122" y="4237228"/>
             <a:ext cx="3527450" cy="168656"/>
           </a:xfrm>
           <a:prstGeom prst="rect">
@@ -10099,7 +10119,7 @@
                 </a:solidFill>
                 <a:latin typeface="Calibri"/>
               </a:rPr>
-              <a:t>CURRENT FLOW</a:t>
+              <a:t>CURRENT CHECKOUT</a:t>
             </a:r>
           </a:p>
         </p:txBody>
@@ -10112,7 +10132,7 @@
         </p:nvSpPr>
         <p:spPr>
           <a:xfrm>
-            <a:off x="4332122" y="4179316"/>
+            <a:off x="4332122" y="4438396"/>
             <a:ext cx="3527450" cy="193421"/>
           </a:xfrm>
           <a:prstGeom prst="rect">
@@ -10134,7 +10154,7 @@
                 </a:solidFill>
                 <a:latin typeface="Calibri"/>
               </a:rPr>
-              <a:t>on 1,200 visits</a:t>
+              <a:t>of 1,200 visits</a:t>
             </a:r>
           </a:p>
         </p:txBody>
@@ -10147,7 +10167,7 @@
         </p:nvSpPr>
         <p:spPr>
           <a:xfrm>
-            <a:off x="4332122" y="4431792"/>
+            <a:off x="4332122" y="4690872"/>
             <a:ext cx="3527450" cy="10972"/>
           </a:xfrm>
           <a:prstGeom prst="rect">
@@ -10191,7 +10211,7 @@
         </p:nvSpPr>
         <p:spPr>
           <a:xfrm>
-            <a:off x="8133892" y="3243072"/>
+            <a:off x="8133892" y="3502152"/>
             <a:ext cx="3527450" cy="698500"/>
           </a:xfrm>
           <a:prstGeom prst="rect">
@@ -10213,7 +10233,7 @@
                 </a:solidFill>
                 <a:latin typeface="Georgia"/>
               </a:rPr>
-              <a:t>1</a:t>
+              <a:t>about 300</a:t>
             </a:r>
           </a:p>
         </p:txBody>
@@ -10226,7 +10246,7 @@
         </p:nvSpPr>
         <p:spPr>
           <a:xfrm>
-            <a:off x="8133892" y="3978148"/>
+            <a:off x="8133892" y="4237228"/>
             <a:ext cx="3527450" cy="168656"/>
           </a:xfrm>
           <a:prstGeom prst="rect">
@@ -10248,7 +10268,7 @@
                 </a:solidFill>
                 <a:latin typeface="Calibri"/>
               </a:rPr>
-              <a:t>MEETING</a:t>
+              <a:t>VISITS PER CHECKOUT</a:t>
             </a:r>
           </a:p>
         </p:txBody>
@@ -10261,7 +10281,7 @@
         </p:nvSpPr>
         <p:spPr>
           <a:xfrm>
-            <a:off x="8133892" y="4179316"/>
+            <a:off x="8133892" y="4438396"/>
             <a:ext cx="3527450" cy="193421"/>
           </a:xfrm>
           <a:prstGeom prst="rect">
@@ -10283,7 +10303,7 @@
                 </a:solidFill>
                 <a:latin typeface="Calibri"/>
               </a:rPr>
-              <a:t>to decide</a:t>
+              <a:t>to tell the two apart</a:t>
             </a:r>
           </a:p>
         </p:txBody>
@@ -10296,7 +10316,7 @@
         </p:nvSpPr>
         <p:spPr>
           <a:xfrm>
-            <a:off x="8133892" y="4431792"/>
+            <a:off x="8133892" y="4690872"/>
             <a:ext cx="3527450" cy="10972"/>
           </a:xfrm>
           <a:prstGeom prst="rect">
@@ -10464,7 +10484,7 @@
         <p:spPr>
           <a:xfrm>
             <a:off x="1713642" y="6437376"/>
-            <a:ext cx="1056417" cy="152146"/>
+            <a:ext cx="1378457" cy="152146"/>
           </a:xfrm>
           <a:prstGeom prst="rect">
             <a:avLst/>
@@ -10485,7 +10505,7 @@
                 </a:solidFill>
                 <a:latin typeface="Calibri"/>
               </a:rPr>
-              <a:t>Three timed cases</a:t>
+              <a:t>Three timed design cases</a:t>
             </a:r>
           </a:p>
         </p:txBody>
@@ -10498,7 +10518,7 @@
         </p:nvSpPr>
         <p:spPr>
           <a:xfrm>
-            <a:off x="2861500" y="6492240"/>
+            <a:off x="3183540" y="6492240"/>
             <a:ext cx="64008" cy="64008"/>
           </a:xfrm>
           <a:prstGeom prst="ellipse">
@@ -10542,7 +10562,7 @@
         </p:nvSpPr>
         <p:spPr>
           <a:xfrm>
-            <a:off x="2971228" y="6437376"/>
+            <a:off x="3293268" y="6437376"/>
             <a:ext cx="688371" cy="152146"/>
           </a:xfrm>
           <a:prstGeom prst="rect">
@@ -10875,7 +10895,7 @@
                 </a:solidFill>
                 <a:latin typeface="Calibri"/>
               </a:rPr>
-              <a:t>The week in six questions, Saturday's paper, and the one step to rerun tonight.</a:t>
+              <a:t>The week in eight questions, Saturday's paper, and the one step to rerun tonight.</a:t>
             </a:r>
           </a:p>
         </p:txBody>
@@ -10944,7 +10964,7 @@
         <p:spPr>
           <a:xfrm>
             <a:off x="1976815" y="5074920"/>
-            <a:ext cx="1372431" cy="310896"/>
+            <a:ext cx="1786943" cy="310896"/>
           </a:xfrm>
           <a:prstGeom prst="roundRect">
             <a:avLst>
@@ -10985,7 +11005,7 @@
                 </a:solidFill>
                 <a:latin typeface="Calibri"/>
               </a:rPr>
-              <a:t>Three timed cases</a:t>
+              <a:t>Three timed design cases</a:t>
             </a:r>
           </a:p>
         </p:txBody>
@@ -10998,7 +11018,7 @@
         </p:nvSpPr>
         <p:spPr>
           <a:xfrm>
-            <a:off x="3458975" y="5074920"/>
+            <a:off x="3873486" y="5074920"/>
             <a:ext cx="898703" cy="310896"/>
           </a:xfrm>
           <a:prstGeom prst="roundRect">
@@ -11075,7 +11095,7 @@
                 </a:solidFill>
                 <a:latin typeface="Calibri"/>
               </a:rPr>
-              <a:t>Week 1, Day 5. The note, defended aloud</a:t>
+              <a:t>Week 1 Day 5: the week rebuilt alone</a:t>
             </a:r>
           </a:p>
         </p:txBody>
@@ -11316,7 +11336,7 @@
                 </a:solidFill>
                 <a:latin typeface="Georgia"/>
               </a:rPr>
-              <a:t>The Kahoot: the week's method in six questions</a:t>
+              <a:t>The Kahoot: the week's method in eight questions</a:t>
             </a:r>
           </a:p>
         </p:txBody>
@@ -11351,14 +11371,14 @@
                 </a:solidFill>
                 <a:latin typeface="Calibri"/>
               </a:rPr>
-              <a:t>Five on the method and one return question from Thursday, ungraded.</a:t>
+              <a:t>Five on the method, two design calls and Thursday's return question, ungraded.</a:t>
             </a:r>
           </a:p>
         </p:txBody>
       </p:sp>
       <p:pic>
         <p:nvPicPr>
-          <p:cNvPr id="9" name="mermaid diagram" descr="24ea5ce26292edcd.png"/>
+          <p:cNvPr id="9" name="mermaid diagram" descr="9c3bfb3b35068990.png"/>
           <p:cNvPicPr>
             <a:picLocks noChangeAspect="1"/>
           </p:cNvPicPr>
@@ -11373,7 +11393,7 @@
         <p:spPr>
           <a:xfrm>
             <a:off x="530352" y="1956816"/>
-            <a:ext cx="11130991" cy="742066"/>
+            <a:ext cx="11130991" cy="793635"/>
           </a:xfrm>
           <a:prstGeom prst="rect">
             <a:avLst/>
@@ -11512,7 +11532,7 @@
         <p:spPr>
           <a:xfrm>
             <a:off x="1713642" y="6437376"/>
-            <a:ext cx="1056417" cy="152146"/>
+            <a:ext cx="1378457" cy="152146"/>
           </a:xfrm>
           <a:prstGeom prst="rect">
             <a:avLst/>
@@ -11533,7 +11553,7 @@
                 </a:solidFill>
                 <a:latin typeface="Calibri"/>
               </a:rPr>
-              <a:t>Three timed cases</a:t>
+              <a:t>Three timed design cases</a:t>
             </a:r>
           </a:p>
         </p:txBody>
@@ -11546,7 +11566,7 @@
         </p:nvSpPr>
         <p:spPr>
           <a:xfrm>
-            <a:off x="2861500" y="6492240"/>
+            <a:off x="3183540" y="6492240"/>
             <a:ext cx="64008" cy="64008"/>
           </a:xfrm>
           <a:prstGeom prst="ellipse">
@@ -11590,7 +11610,7 @@
         </p:nvSpPr>
         <p:spPr>
           <a:xfrm>
-            <a:off x="2971228" y="6437376"/>
+            <a:off x="3293268" y="6437376"/>
             <a:ext cx="688371" cy="152146"/>
           </a:xfrm>
           <a:prstGeom prst="rect">
@@ -11902,7 +11922,7 @@
         <p:spPr>
           <a:xfrm>
             <a:off x="530352" y="1956816"/>
-            <a:ext cx="2645587" cy="2344420"/>
+            <a:ext cx="2645587" cy="2534412"/>
           </a:xfrm>
           <a:prstGeom prst="roundRect">
             <a:avLst>
@@ -12080,7 +12100,7 @@
                 </a:solidFill>
                 <a:latin typeface="Calibri"/>
               </a:rPr>
-              <a:t>110 minutes</a:t>
+              <a:t>120 minutes</a:t>
             </a:r>
           </a:p>
         </p:txBody>
@@ -12094,7 +12114,7 @@
         <p:spPr>
           <a:xfrm>
             <a:off x="731519" y="3303524"/>
-            <a:ext cx="2243251" cy="763016"/>
+            <a:ext cx="2243251" cy="944626"/>
           </a:xfrm>
           <a:prstGeom prst="rect">
             <a:avLst/>
@@ -12115,7 +12135,7 @@
                 </a:solidFill>
                 <a:latin typeface="Calibri"/>
               </a:rPr>
-              <a:t>Fill in the blank, true or false, single and multiple choice, scenario sets, applied maths and ordering.</a:t>
+              <a:t>Blanks from a word bank, pairs from a match table, statements judged with their reason, scenario sets, applied maths and ordering.</a:t>
             </a:r>
           </a:p>
         </p:txBody>
@@ -12129,7 +12149,7 @@
         <p:spPr>
           <a:xfrm>
             <a:off x="3358819" y="1956816"/>
-            <a:ext cx="2645587" cy="2344420"/>
+            <a:ext cx="2645587" cy="2534412"/>
           </a:xfrm>
           <a:prstGeom prst="roundRect">
             <a:avLst>
@@ -12356,7 +12376,7 @@
         <p:spPr>
           <a:xfrm>
             <a:off x="6187287" y="1956816"/>
-            <a:ext cx="2645587" cy="2344420"/>
+            <a:ext cx="2645587" cy="2534412"/>
           </a:xfrm>
           <a:prstGeom prst="roundRect">
             <a:avLst>
@@ -12583,7 +12603,7 @@
         <p:spPr>
           <a:xfrm>
             <a:off x="9015755" y="1956816"/>
-            <a:ext cx="2645587" cy="2344420"/>
+            <a:ext cx="2645587" cy="2534412"/>
           </a:xfrm>
           <a:prstGeom prst="roundRect">
             <a:avLst>
@@ -12933,7 +12953,7 @@
         <p:spPr>
           <a:xfrm>
             <a:off x="1713642" y="6437376"/>
-            <a:ext cx="1056417" cy="152146"/>
+            <a:ext cx="1378457" cy="152146"/>
           </a:xfrm>
           <a:prstGeom prst="rect">
             <a:avLst/>
@@ -12954,7 +12974,7 @@
                 </a:solidFill>
                 <a:latin typeface="Calibri"/>
               </a:rPr>
-              <a:t>Three timed cases</a:t>
+              <a:t>Three timed design cases</a:t>
             </a:r>
           </a:p>
         </p:txBody>
@@ -12967,7 +12987,7 @@
         </p:nvSpPr>
         <p:spPr>
           <a:xfrm>
-            <a:off x="2861500" y="6492240"/>
+            <a:off x="3183540" y="6492240"/>
             <a:ext cx="64008" cy="64008"/>
           </a:xfrm>
           <a:prstGeom prst="ellipse">
@@ -13011,7 +13031,7 @@
         </p:nvSpPr>
         <p:spPr>
           <a:xfrm>
-            <a:off x="2971228" y="6437376"/>
+            <a:off x="3293268" y="6437376"/>
             <a:ext cx="688371" cy="152146"/>
           </a:xfrm>
           <a:prstGeom prst="rect">
@@ -13791,7 +13811,7 @@
         <p:spPr>
           <a:xfrm>
             <a:off x="1713642" y="6437376"/>
-            <a:ext cx="1056417" cy="152146"/>
+            <a:ext cx="1378457" cy="152146"/>
           </a:xfrm>
           <a:prstGeom prst="rect">
             <a:avLst/>
@@ -13812,7 +13832,7 @@
                 </a:solidFill>
                 <a:latin typeface="Calibri"/>
               </a:rPr>
-              <a:t>Three timed cases</a:t>
+              <a:t>Three timed design cases</a:t>
             </a:r>
           </a:p>
         </p:txBody>
@@ -13825,7 +13845,7 @@
         </p:nvSpPr>
         <p:spPr>
           <a:xfrm>
-            <a:off x="2861500" y="6492240"/>
+            <a:off x="3183540" y="6492240"/>
             <a:ext cx="64008" cy="64008"/>
           </a:xfrm>
           <a:prstGeom prst="ellipse">
@@ -13869,7 +13889,7 @@
         </p:nvSpPr>
         <p:spPr>
           <a:xfrm>
-            <a:off x="2971228" y="6437376"/>
+            <a:off x="3293268" y="6437376"/>
             <a:ext cx="688371" cy="152146"/>
           </a:xfrm>
           <a:prstGeom prst="rect">
@@ -15148,7 +15168,7 @@
         <p:spPr>
           <a:xfrm>
             <a:off x="1713642" y="6437376"/>
-            <a:ext cx="1056417" cy="152146"/>
+            <a:ext cx="1378457" cy="152146"/>
           </a:xfrm>
           <a:prstGeom prst="rect">
             <a:avLst/>
@@ -15169,7 +15189,7 @@
                 </a:solidFill>
                 <a:latin typeface="Calibri"/>
               </a:rPr>
-              <a:t>Three timed cases</a:t>
+              <a:t>Three timed design cases</a:t>
             </a:r>
           </a:p>
         </p:txBody>
@@ -15182,7 +15202,7 @@
         </p:nvSpPr>
         <p:spPr>
           <a:xfrm>
-            <a:off x="2861500" y="6492240"/>
+            <a:off x="3183540" y="6492240"/>
             <a:ext cx="64008" cy="64008"/>
           </a:xfrm>
           <a:prstGeom prst="ellipse">
@@ -15226,7 +15246,7 @@
         </p:nvSpPr>
         <p:spPr>
           <a:xfrm>
-            <a:off x="2971228" y="6437376"/>
+            <a:off x="3293268" y="6437376"/>
             <a:ext cx="688371" cy="152146"/>
           </a:xfrm>
           <a:prstGeom prst="rect">
@@ -15628,7 +15648,7 @@
         <p:spPr>
           <a:xfrm>
             <a:off x="1976815" y="5074920"/>
-            <a:ext cx="1372431" cy="310896"/>
+            <a:ext cx="1786943" cy="310896"/>
           </a:xfrm>
           <a:prstGeom prst="roundRect">
             <a:avLst>
@@ -15669,7 +15689,7 @@
                 </a:solidFill>
                 <a:latin typeface="Calibri"/>
               </a:rPr>
-              <a:t>Three timed cases</a:t>
+              <a:t>Three timed design cases</a:t>
             </a:r>
           </a:p>
         </p:txBody>
@@ -15682,7 +15702,7 @@
         </p:nvSpPr>
         <p:spPr>
           <a:xfrm>
-            <a:off x="3458975" y="5074920"/>
+            <a:off x="3873486" y="5074920"/>
             <a:ext cx="898703" cy="310896"/>
           </a:xfrm>
           <a:prstGeom prst="roundRect">
@@ -15759,7 +15779,7 @@
                 </a:solidFill>
                 <a:latin typeface="Calibri"/>
               </a:rPr>
-              <a:t>Week 1, Day 5. The note, defended aloud</a:t>
+              <a:t>Week 1 Day 5: the week rebuilt alone</a:t>
             </a:r>
           </a:p>
         </p:txBody>
@@ -17277,7 +17297,7 @@
         <p:spPr>
           <a:xfrm>
             <a:off x="1713642" y="6437376"/>
-            <a:ext cx="1056417" cy="152146"/>
+            <a:ext cx="1378457" cy="152146"/>
           </a:xfrm>
           <a:prstGeom prst="rect">
             <a:avLst/>
@@ -17298,7 +17318,7 @@
                 </a:solidFill>
                 <a:latin typeface="Calibri"/>
               </a:rPr>
-              <a:t>Three timed cases</a:t>
+              <a:t>Three timed design cases</a:t>
             </a:r>
           </a:p>
         </p:txBody>
@@ -17311,7 +17331,7 @@
         </p:nvSpPr>
         <p:spPr>
           <a:xfrm>
-            <a:off x="2861500" y="6492240"/>
+            <a:off x="3183540" y="6492240"/>
             <a:ext cx="64008" cy="64008"/>
           </a:xfrm>
           <a:prstGeom prst="ellipse">
@@ -17355,7 +17375,7 @@
         </p:nvSpPr>
         <p:spPr>
           <a:xfrm>
-            <a:off x="2971228" y="6437376"/>
+            <a:off x="3293268" y="6437376"/>
             <a:ext cx="688371" cy="152146"/>
           </a:xfrm>
           <a:prstGeom prst="rect">
@@ -18837,7 +18857,7 @@
         <p:spPr>
           <a:xfrm>
             <a:off x="1713642" y="6437376"/>
-            <a:ext cx="1056417" cy="152146"/>
+            <a:ext cx="1378457" cy="152146"/>
           </a:xfrm>
           <a:prstGeom prst="rect">
             <a:avLst/>
@@ -18858,7 +18878,7 @@
                 </a:solidFill>
                 <a:latin typeface="Calibri"/>
               </a:rPr>
-              <a:t>Three timed cases</a:t>
+              <a:t>Three timed design cases</a:t>
             </a:r>
           </a:p>
         </p:txBody>
@@ -18871,7 +18891,7 @@
         </p:nvSpPr>
         <p:spPr>
           <a:xfrm>
-            <a:off x="2861500" y="6492240"/>
+            <a:off x="3183540" y="6492240"/>
             <a:ext cx="64008" cy="64008"/>
           </a:xfrm>
           <a:prstGeom prst="ellipse">
@@ -18915,7 +18935,7 @@
         </p:nvSpPr>
         <p:spPr>
           <a:xfrm>
-            <a:off x="2971228" y="6437376"/>
+            <a:off x="3293268" y="6437376"/>
             <a:ext cx="688371" cy="152146"/>
           </a:xfrm>
           <a:prstGeom prst="rect">
@@ -19220,7 +19240,7 @@
       </p:sp>
       <p:pic>
         <p:nvPicPr>
-          <p:cNvPr id="9" name="mermaid diagram" descr="edb506cb4fd10d47.png"/>
+          <p:cNvPr id="9" name="mermaid diagram" descr="9ad772b26513e7bb.png"/>
           <p:cNvPicPr>
             <a:picLocks noChangeAspect="1"/>
           </p:cNvPicPr>
@@ -19408,7 +19428,7 @@
         <p:spPr>
           <a:xfrm>
             <a:off x="1713642" y="6437376"/>
-            <a:ext cx="1056417" cy="152146"/>
+            <a:ext cx="1378457" cy="152146"/>
           </a:xfrm>
           <a:prstGeom prst="rect">
             <a:avLst/>
@@ -19429,7 +19449,7 @@
                 </a:solidFill>
                 <a:latin typeface="Calibri"/>
               </a:rPr>
-              <a:t>Three timed cases</a:t>
+              <a:t>Three timed design cases</a:t>
             </a:r>
           </a:p>
         </p:txBody>
@@ -19442,7 +19462,7 @@
         </p:nvSpPr>
         <p:spPr>
           <a:xfrm>
-            <a:off x="2861500" y="6492240"/>
+            <a:off x="3183540" y="6492240"/>
             <a:ext cx="64008" cy="64008"/>
           </a:xfrm>
           <a:prstGeom prst="ellipse">
@@ -19486,7 +19506,7 @@
         </p:nvSpPr>
         <p:spPr>
           <a:xfrm>
-            <a:off x="2971228" y="6437376"/>
+            <a:off x="3293268" y="6437376"/>
             <a:ext cx="688371" cy="152146"/>
           </a:xfrm>
           <a:prstGeom prst="rect">
@@ -19791,7 +19811,7 @@
       </p:sp>
       <p:pic>
         <p:nvPicPr>
-          <p:cNvPr id="9" name="mermaid diagram" descr="1e64eb23838bf938.png"/>
+          <p:cNvPr id="9" name="mermaid diagram" descr="658eabffd8fd6df6.png"/>
           <p:cNvPicPr>
             <a:picLocks noChangeAspect="1"/>
           </p:cNvPicPr>
@@ -20136,7 +20156,7 @@
         <p:spPr>
           <a:xfrm>
             <a:off x="1713642" y="6437376"/>
-            <a:ext cx="1056417" cy="152146"/>
+            <a:ext cx="1378457" cy="152146"/>
           </a:xfrm>
           <a:prstGeom prst="rect">
             <a:avLst/>
@@ -20157,7 +20177,7 @@
                 </a:solidFill>
                 <a:latin typeface="Calibri"/>
               </a:rPr>
-              <a:t>Three timed cases</a:t>
+              <a:t>Three timed design cases</a:t>
             </a:r>
           </a:p>
         </p:txBody>
@@ -20170,7 +20190,7 @@
         </p:nvSpPr>
         <p:spPr>
           <a:xfrm>
-            <a:off x="2861500" y="6492240"/>
+            <a:off x="3183540" y="6492240"/>
             <a:ext cx="64008" cy="64008"/>
           </a:xfrm>
           <a:prstGeom prst="ellipse">
@@ -20214,7 +20234,7 @@
         </p:nvSpPr>
         <p:spPr>
           <a:xfrm>
-            <a:off x="2971228" y="6437376"/>
+            <a:off x="3293268" y="6437376"/>
             <a:ext cx="688371" cy="152146"/>
           </a:xfrm>
           <a:prstGeom prst="rect">
@@ -20519,7 +20539,7 @@
       </p:sp>
       <p:pic>
         <p:nvPicPr>
-          <p:cNvPr id="9" name="mermaid diagram" descr="9b96086d9a4bf2a5.png"/>
+          <p:cNvPr id="9" name="mermaid diagram" descr="979168cf41283807.png"/>
           <p:cNvPicPr>
             <a:picLocks noChangeAspect="1"/>
           </p:cNvPicPr>
@@ -20712,7 +20732,7 @@
         <p:spPr>
           <a:xfrm>
             <a:off x="1713642" y="6437376"/>
-            <a:ext cx="1056417" cy="152146"/>
+            <a:ext cx="1378457" cy="152146"/>
           </a:xfrm>
           <a:prstGeom prst="rect">
             <a:avLst/>
@@ -20733,7 +20753,7 @@
                 </a:solidFill>
                 <a:latin typeface="Calibri"/>
               </a:rPr>
-              <a:t>Three timed cases</a:t>
+              <a:t>Three timed design cases</a:t>
             </a:r>
           </a:p>
         </p:txBody>
@@ -20746,7 +20766,7 @@
         </p:nvSpPr>
         <p:spPr>
           <a:xfrm>
-            <a:off x="2861500" y="6492240"/>
+            <a:off x="3183540" y="6492240"/>
             <a:ext cx="64008" cy="64008"/>
           </a:xfrm>
           <a:prstGeom prst="ellipse">
@@ -20790,7 +20810,7 @@
         </p:nvSpPr>
         <p:spPr>
           <a:xfrm>
-            <a:off x="2971228" y="6437376"/>
+            <a:off x="3293268" y="6437376"/>
             <a:ext cx="688371" cy="152146"/>
           </a:xfrm>
           <a:prstGeom prst="rect">
@@ -22172,7 +22192,7 @@
         <p:spPr>
           <a:xfrm>
             <a:off x="1713642" y="6437376"/>
-            <a:ext cx="1056417" cy="152146"/>
+            <a:ext cx="1378457" cy="152146"/>
           </a:xfrm>
           <a:prstGeom prst="rect">
             <a:avLst/>
@@ -22193,7 +22213,7 @@
                 </a:solidFill>
                 <a:latin typeface="Calibri"/>
               </a:rPr>
-              <a:t>Three timed cases</a:t>
+              <a:t>Three timed design cases</a:t>
             </a:r>
           </a:p>
         </p:txBody>
@@ -22206,7 +22226,7 @@
         </p:nvSpPr>
         <p:spPr>
           <a:xfrm>
-            <a:off x="2861500" y="6492240"/>
+            <a:off x="3183540" y="6492240"/>
             <a:ext cx="64008" cy="64008"/>
           </a:xfrm>
           <a:prstGeom prst="ellipse">
@@ -22250,7 +22270,7 @@
         </p:nvSpPr>
         <p:spPr>
           <a:xfrm>
-            <a:off x="2971228" y="6437376"/>
+            <a:off x="3293268" y="6437376"/>
             <a:ext cx="688371" cy="152146"/>
           </a:xfrm>
           <a:prstGeom prst="rect">
@@ -22555,7 +22575,7 @@
       </p:sp>
       <p:pic>
         <p:nvPicPr>
-          <p:cNvPr id="9" name="mermaid diagram" descr="aee3bf44cdc4d253.png"/>
+          <p:cNvPr id="9" name="mermaid diagram" descr="5b384aa1cbb34c66.png"/>
           <p:cNvPicPr>
             <a:picLocks noChangeAspect="1"/>
           </p:cNvPicPr>
@@ -22748,7 +22768,7 @@
         <p:spPr>
           <a:xfrm>
             <a:off x="1713642" y="6437376"/>
-            <a:ext cx="1056417" cy="152146"/>
+            <a:ext cx="1378457" cy="152146"/>
           </a:xfrm>
           <a:prstGeom prst="rect">
             <a:avLst/>
@@ -22769,7 +22789,7 @@
                 </a:solidFill>
                 <a:latin typeface="Calibri"/>
               </a:rPr>
-              <a:t>Three timed cases</a:t>
+              <a:t>Three timed design cases</a:t>
             </a:r>
           </a:p>
         </p:txBody>
@@ -22782,7 +22802,7 @@
         </p:nvSpPr>
         <p:spPr>
           <a:xfrm>
-            <a:off x="2861500" y="6492240"/>
+            <a:off x="3183540" y="6492240"/>
             <a:ext cx="64008" cy="64008"/>
           </a:xfrm>
           <a:prstGeom prst="ellipse">
@@ -22826,7 +22846,7 @@
         </p:nvSpPr>
         <p:spPr>
           <a:xfrm>
-            <a:off x="2971228" y="6437376"/>
+            <a:off x="3293268" y="6437376"/>
             <a:ext cx="688371" cy="152146"/>
           </a:xfrm>
           <a:prstGeom prst="rect">

--- a/content/W01/D5/slides/C2_W01_D05_rehearsal_STUDENT.pptx
+++ b/content/W01/D5/slides/C2_W01_D05_rehearsal_STUDENT.pptx
@@ -1585,7 +1585,7 @@
           <a:lstStyle/>
           <a:p>
             <a:r>
-              <a:t>LIVE, 2 minutes. Read the four pushes in a Marketing voice, not a villain's. The partner playing</a:t>
+              <a:t>LIVE, 2 minutes. Read the four pushes in a fair Marketing voice. The partner playing</a:t>
             </a:r>
           </a:p>
           <a:p>
@@ -8028,7 +8028,7 @@
       </p:sp>
       <p:pic>
         <p:nvPicPr>
-          <p:cNvPr id="14" name="mermaid diagram" descr="e377a0ada08ea71f.png"/>
+          <p:cNvPr id="14" name="mermaid diagram" descr="2e76e40b7f31703c.png"/>
           <p:cNvPicPr>
             <a:picLocks noChangeAspect="1"/>
           </p:cNvPicPr>
@@ -8043,7 +8043,7 @@
         <p:spPr>
           <a:xfrm>
             <a:off x="530352" y="3502152"/>
-            <a:ext cx="11130991" cy="1028477"/>
+            <a:ext cx="11130991" cy="2055548"/>
           </a:xfrm>
           <a:prstGeom prst="rect">
             <a:avLst/>
@@ -10303,7 +10303,7 @@
                 </a:solidFill>
                 <a:latin typeface="Calibri"/>
               </a:rPr>
-              <a:t>to tell the two apart</a:t>
+              <a:t>in an equal split, to tell the two apart</a:t>
             </a:r>
           </a:p>
         </p:txBody>
@@ -11378,7 +11378,7 @@
       </p:sp>
       <p:pic>
         <p:nvPicPr>
-          <p:cNvPr id="9" name="mermaid diagram" descr="9c3bfb3b35068990.png"/>
+          <p:cNvPr id="9" name="mermaid diagram" descr="11a77ed4f1c2fc56.png"/>
           <p:cNvPicPr>
             <a:picLocks noChangeAspect="1"/>
           </p:cNvPicPr>
@@ -11392,8 +11392,8 @@
         </p:blipFill>
         <p:spPr>
           <a:xfrm>
-            <a:off x="530352" y="1956816"/>
-            <a:ext cx="11130991" cy="793635"/>
+            <a:off x="1466697" y="1956816"/>
+            <a:ext cx="9258300" cy="1628775"/>
           </a:xfrm>
           <a:prstGeom prst="rect">
             <a:avLst/>
@@ -13398,7 +13398,7 @@
                 </a:solidFill>
                 <a:latin typeface="Calibri"/>
               </a:rPr>
-              <a:t>A total you have not reconciled is a guess with a decimal point.</a:t>
+              <a:t>Reconcile counts and rupees to a control total before you quote a total.</a:t>
             </a:r>
           </a:p>
         </p:txBody>
@@ -13467,7 +13467,7 @@
                 </a:solidFill>
                 <a:latin typeface="Calibri"/>
               </a:rPr>
-              <a:t>Zero rejects on a file you know is dirty is a finding, not a result.</a:t>
+              <a:t>A zero-reject pass on a file you know is dirty is the first thing to investigate.</a:t>
             </a:r>
           </a:p>
         </p:txBody>
@@ -13536,7 +13536,7 @@
                 </a:solidFill>
                 <a:latin typeface="Calibri"/>
               </a:rPr>
-              <a:t>Count before rate: a rate on a handful of orders is a rumour with a percent sign.</a:t>
+              <a:t>Count before rate: put the order count beside every rate before it leads a note.</a:t>
             </a:r>
           </a:p>
         </p:txBody>
@@ -13605,7 +13605,7 @@
                 </a:solidFill>
                 <a:latin typeface="Calibri"/>
               </a:rPr>
-              <a:t>Shuffle what belongs together: the customer, not the order.</a:t>
+              <a:t>Shuffle what belongs together, which this week is the customer.</a:t>
             </a:r>
           </a:p>
         </p:txBody>
@@ -15031,7 +15031,7 @@
                 </a:solidFill>
                 <a:latin typeface="Calibri"/>
               </a:rPr>
-              <a:t>On Monday, Meera hears a note from someone who rebuilt every number in it alone this morning, and Marketing cannot say otherwise.</a:t>
+              <a:t>On Monday, Meera hears a note from someone who rebuilt every number in it alone this morning and reconciled it to Anand's books.</a:t>
             </a:r>
           </a:p>
         </p:txBody>
@@ -19233,7 +19233,7 @@
                 </a:solidFill>
                 <a:latin typeface="Calibri"/>
               </a:rPr>
-              <a:t>Every push is a fair question with a motive behind it; answer the question, not the motive.</a:t>
+              <a:t>Every push is a fair question with a motive behind it; answer the question it asks.</a:t>
             </a:r>
           </a:p>
         </p:txBody>

--- a/content/W01/D5/slides/C2_W01_D05_rehearsal_STUDENT.pptx
+++ b/content/W01/D5/slides/C2_W01_D05_rehearsal_STUDENT.pptx
@@ -1515,7 +1515,7 @@
           </a:p>
           <a:p>
             <a:r>
-              <a:t>the evidence; the fix is one number fewer, never a faster voice.</a:t>
+              <a:t>the evidence; the fix is one number fewer at the same pace.</a:t>
             </a:r>
           </a:p>
         </p:txBody>
@@ -13329,7 +13329,7 @@
                 </a:solidFill>
                 <a:latin typeface="Calibri"/>
               </a:rPr>
-              <a:t>The same five lines close the study notes, word for word.</a:t>
+              <a:t>Five lines, one per step the week made yours.</a:t>
             </a:r>
           </a:p>
         </p:txBody>

--- a/content/W01/D5/slides/C2_W01_D05_rehearsal_STUDENT.pptx
+++ b/content/W01/D5/slides/C2_W01_D05_rehearsal_STUDENT.pptx
@@ -18543,7 +18543,7 @@
         <p:spPr>
           <a:xfrm>
             <a:off x="530352" y="4103624"/>
-            <a:ext cx="11130991" cy="1121664"/>
+            <a:ext cx="11130991" cy="862584"/>
           </a:xfrm>
           <a:prstGeom prst="roundRect">
             <a:avLst>
@@ -18596,7 +18596,7 @@
         </p:nvSpPr>
         <p:spPr>
           <a:xfrm>
-            <a:off x="758952" y="4435856"/>
+            <a:off x="758952" y="4306316"/>
             <a:ext cx="457200" cy="457200"/>
           </a:xfrm>
           <a:prstGeom prst="ellipse">
@@ -18648,7 +18648,7 @@
         </p:blipFill>
         <p:spPr>
           <a:xfrm>
-            <a:off x="868680" y="4545584"/>
+            <a:off x="868680" y="4416044"/>
             <a:ext cx="237744" cy="237744"/>
           </a:xfrm>
           <a:prstGeom prst="rect">
@@ -18700,7 +18700,7 @@
         <p:spPr>
           <a:xfrm>
             <a:off x="1399031" y="4469384"/>
-            <a:ext cx="9987991" cy="682752"/>
+            <a:ext cx="9987991" cy="423672"/>
           </a:xfrm>
           <a:prstGeom prst="rect">
             <a:avLst/>
@@ -18720,7 +18720,7 @@
                 </a:solidFill>
                 <a:latin typeface="Calibri"/>
               </a:rPr>
-              <a:t>The caveat said first is a sign of control. The same caveat dragged out of you by Marketing reads as a retreat.</a:t>
+              <a:t>Say the caveat before Marketing finds it, so the room hears it as part of the claim.</a:t>
             </a:r>
           </a:p>
         </p:txBody>

--- a/content/W01/D5/slides/C2_W01_D05_rehearsal_STUDENT.pptx
+++ b/content/W01/D5/slides/C2_W01_D05_rehearsal_STUDENT.pptx
@@ -1360,7 +1360,7 @@
           </a:p>
           <a:p>
             <a:r>
-              <a:t>If time is short, round two is the first thing cut, never round one.</a:t>
+              <a:t>If time is short, cut round two first and keep round one whole.</a:t>
             </a:r>
           </a:p>
         </p:txBody>
@@ -12816,7 +12816,7 @@
                 </a:solidFill>
                 <a:latin typeface="Calibri"/>
               </a:rPr>
-              <a:t>A performance indicator for you and the team, never a ranking.</a:t>
+              <a:t>A performance indicator for you and the team, with no ranking.</a:t>
             </a:r>
           </a:p>
         </p:txBody>

--- a/content/W01/D5/slides/C2_W01_D05_rehearsal_STUDENT.pptx
+++ b/content/W01/D5/slides/C2_W01_D05_rehearsal_STUDENT.pptx
@@ -755,12 +755,17 @@
           <a:lstStyle/>
           <a:p>
             <a:r>
-              <a:t>LIVE, 13 minutes. Listen for the options sized against the two hours, for the reconciliation named</a:t>
-            </a:r>
-          </a:p>
-          <a:p>
-            <a:r>
-              <a:t>as the step never dropped, and for the fact that would switch the plan.</a:t>
+              <a:t>LIVE, 13 minutes. Listen for every plan sized from the lab's pace (all four cost between 95 and 105</a:t>
+            </a:r>
+          </a:p>
+          <a:p>
+            <a:r>
+              <a:t>minutes, so the clock does not choose), for the reconciliation named as the step never dropped, and</a:t>
+            </a:r>
+          </a:p>
+          <a:p>
+            <a:r>
+              <a:t>for the fact that would switch the plan.</a:t>
             </a:r>
           </a:p>
         </p:txBody>
@@ -1430,7 +1435,7 @@
           <a:lstStyle/>
           <a:p>
             <a:r>
-              <a:t>LIVE, 3 minutes. Name the four and the one thing each listens for. The note being rehearsed is the</a:t>
+              <a:t>LIVE, 2 minutes. Name the four and the one thing each listens for. The note being rehearsed is the</a:t>
             </a:r>
           </a:p>
           <a:p>
@@ -1510,7 +1515,7 @@
           <a:lstStyle/>
           <a:p>
             <a:r>
-              <a:t>LIVE, 2 minutes. The timings add to two minutes. A learner who runs long almost always ran long in</a:t>
+              <a:t>LIVE, 1 minute. The timings add to two minutes. A learner who runs long almost always ran long in</a:t>
             </a:r>
           </a:p>
           <a:p>
@@ -1595,12 +1600,12 @@
           </a:p>
           <a:p>
             <a:r>
-              <a:t>The first push is the sharpest: the brief answers it in full, and a TA reads Marketing's lines while</a:t>
-            </a:r>
-          </a:p>
-          <a:p>
-            <a:r>
-              <a:t>you model the answer once.</a:t>
+              <a:t>The first push is the sharpest: the brief answers it in full, and after S6 a TA reads Marketing's</a:t>
+            </a:r>
+          </a:p>
+          <a:p>
+            <a:r>
+              <a:t>lines while you model the answer once, in four minutes. It is on neither pair list.</a:t>
             </a:r>
           </a:p>
         </p:txBody>
@@ -1670,7 +1675,7 @@
           <a:lstStyle/>
           <a:p>
             <a:r>
-              <a:t>LIVE, 3 minutes. Demonstrate the three moves once with a volunteer playing Marketing on the</a:t>
+              <a:t>LIVE, 2 minutes. Demonstrate the three moves once with a volunteer playing Marketing on the</a:t>
             </a:r>
           </a:p>
           <a:p>
@@ -1750,7 +1755,12 @@
           <a:lstStyle/>
           <a:p>
             <a:r>
-              <a:t>LIVE, 50 minutes, of which S1 to S4 and S6 took the first six. The TAs walk the room. Each TA also uses this round to tell each of their learners,</a:t>
+              <a:t>LIVE, 50 minutes: S1 to S4 and S6 take eight, Marketing's sharpest push, modelled once with a TA,</a:t>
+            </a:r>
+          </a:p>
+          <a:p>
+            <a:r>
+              <a:t>takes four, and the pairs take the other 38. The TAs walk the room. Each TA also uses this round to tell each of their learners,</a:t>
             </a:r>
           </a:p>
           <a:p>
@@ -5994,7 +6004,7 @@
                 </a:solidFill>
                 <a:latin typeface="Calibri"/>
               </a:rPr>
-              <a:t>Week 1 Day 5: the week rebuilt alone</a:t>
+              <a:t>Week 1, Day 5. The note, defended aloud</a:t>
             </a:r>
           </a:p>
         </p:txBody>
@@ -7830,7 +7840,7 @@
                 </a:solidFill>
                 <a:latin typeface="Calibri"/>
               </a:rPr>
-              <a:t>A raw export, a review on Monday, and four plans that fit the clock differently.</a:t>
+              <a:t>A raw export, a review on Monday, and four plans that each fit the clock and each leave a step out.</a:t>
             </a:r>
           </a:p>
         </p:txBody>
@@ -8021,14 +8031,14 @@
                 </a:solidFill>
                 <a:latin typeface="Calibri"/>
               </a:rPr>
-              <a:t>[F] You have two hours and a raw export; what do you do first, and what do you skip? Here the export is Q3 from the ERP, and DMart is the likeness: it publishes a provisional quarter days before its board signs the results.</a:t>
+              <a:t>[F] You have two hours and a raw export; what do you do first, and what do you skip? Here the export is Q3 from the ERP, and DMart is the likeness: it publishes a provisional quarter days before it files the results.</a:t>
             </a:r>
           </a:p>
         </p:txBody>
       </p:sp>
       <p:pic>
         <p:nvPicPr>
-          <p:cNvPr id="14" name="mermaid diagram" descr="2e76e40b7f31703c.png"/>
+          <p:cNvPr id="14" name="mermaid diagram" descr="bf8c3587e8789414.png"/>
           <p:cNvPicPr>
             <a:picLocks noChangeAspect="1"/>
           </p:cNvPicPr>
@@ -8042,8 +8052,8 @@
         </p:blipFill>
         <p:spPr>
           <a:xfrm>
-            <a:off x="530352" y="3502152"/>
-            <a:ext cx="11130991" cy="2055548"/>
+            <a:off x="1638147" y="3502152"/>
+            <a:ext cx="8915400" cy="2271712"/>
           </a:xfrm>
           <a:prstGeom prst="rect">
             <a:avLst/>
@@ -8572,7 +8582,7 @@
         <p:spPr>
           <a:xfrm>
             <a:off x="530352" y="1956816"/>
-            <a:ext cx="11130991" cy="1121664"/>
+            <a:ext cx="11130991" cy="1380744"/>
           </a:xfrm>
           <a:prstGeom prst="roundRect">
             <a:avLst>
@@ -8625,7 +8635,7 @@
         </p:nvSpPr>
         <p:spPr>
           <a:xfrm>
-            <a:off x="758952" y="2289048"/>
+            <a:off x="758952" y="2418588"/>
             <a:ext cx="457200" cy="457200"/>
           </a:xfrm>
           <a:prstGeom prst="ellipse">
@@ -8677,7 +8687,7 @@
         </p:blipFill>
         <p:spPr>
           <a:xfrm>
-            <a:off x="868680" y="2398776"/>
+            <a:off x="868680" y="2528316"/>
             <a:ext cx="237744" cy="237744"/>
           </a:xfrm>
           <a:prstGeom prst="rect">
@@ -8729,7 +8739,7 @@
         <p:spPr>
           <a:xfrm>
             <a:off x="1399031" y="2322576"/>
-            <a:ext cx="9987991" cy="682752"/>
+            <a:ext cx="9987991" cy="941832"/>
           </a:xfrm>
           <a:prstGeom prst="rect">
             <a:avLst/>
@@ -8749,7 +8759,7 @@
                 </a:solidFill>
                 <a:latin typeface="Calibri"/>
               </a:rPr>
-              <a:t>[S] Walk me through how you clean and check a dataset you have never seen. Here four checks cost from seconds to a day, and TSB is the likeness: a migrated platform trusted before it was reconciled.</a:t>
+              <a:t>[S] Walk me through how you clean and check a dataset you have never seen. Here four checks cost from seconds to a day, and TSB is a loose likeness: a new platform whose output was trusted before it was checked.</a:t>
             </a:r>
           </a:p>
         </p:txBody>
@@ -8762,7 +8772,7 @@
         </p:nvSpPr>
         <p:spPr>
           <a:xfrm>
-            <a:off x="530352" y="3243072"/>
+            <a:off x="530352" y="3502152"/>
             <a:ext cx="3527450" cy="698500"/>
           </a:xfrm>
           <a:prstGeom prst="rect">
@@ -8797,7 +8807,7 @@
         </p:nvSpPr>
         <p:spPr>
           <a:xfrm>
-            <a:off x="530352" y="3978148"/>
+            <a:off x="530352" y="4237228"/>
             <a:ext cx="3527450" cy="168656"/>
           </a:xfrm>
           <a:prstGeom prst="rect">
@@ -8832,7 +8842,7 @@
         </p:nvSpPr>
         <p:spPr>
           <a:xfrm>
-            <a:off x="530352" y="4179316"/>
+            <a:off x="530352" y="4438396"/>
             <a:ext cx="3527450" cy="193421"/>
           </a:xfrm>
           <a:prstGeom prst="rect">
@@ -8867,7 +8877,7 @@
         </p:nvSpPr>
         <p:spPr>
           <a:xfrm>
-            <a:off x="530352" y="4431792"/>
+            <a:off x="530352" y="4690872"/>
             <a:ext cx="3527450" cy="10972"/>
           </a:xfrm>
           <a:prstGeom prst="rect">
@@ -8911,7 +8921,7 @@
         </p:nvSpPr>
         <p:spPr>
           <a:xfrm>
-            <a:off x="4332122" y="3243072"/>
+            <a:off x="4332122" y="3502152"/>
             <a:ext cx="3527450" cy="698500"/>
           </a:xfrm>
           <a:prstGeom prst="rect">
@@ -8946,7 +8956,7 @@
         </p:nvSpPr>
         <p:spPr>
           <a:xfrm>
-            <a:off x="4332122" y="3978148"/>
+            <a:off x="4332122" y="4237228"/>
             <a:ext cx="3527450" cy="168656"/>
           </a:xfrm>
           <a:prstGeom prst="rect">
@@ -8981,7 +8991,7 @@
         </p:nvSpPr>
         <p:spPr>
           <a:xfrm>
-            <a:off x="4332122" y="4179316"/>
+            <a:off x="4332122" y="4438396"/>
             <a:ext cx="3527450" cy="193421"/>
           </a:xfrm>
           <a:prstGeom prst="rect">
@@ -9016,7 +9026,7 @@
         </p:nvSpPr>
         <p:spPr>
           <a:xfrm>
-            <a:off x="4332122" y="4431792"/>
+            <a:off x="4332122" y="4690872"/>
             <a:ext cx="3527450" cy="10972"/>
           </a:xfrm>
           <a:prstGeom prst="rect">
@@ -9060,7 +9070,7 @@
         </p:nvSpPr>
         <p:spPr>
           <a:xfrm>
-            <a:off x="8133892" y="3243072"/>
+            <a:off x="8133892" y="3502152"/>
             <a:ext cx="3527450" cy="698500"/>
           </a:xfrm>
           <a:prstGeom prst="rect">
@@ -9095,7 +9105,7 @@
         </p:nvSpPr>
         <p:spPr>
           <a:xfrm>
-            <a:off x="8133892" y="3978148"/>
+            <a:off x="8133892" y="4237228"/>
             <a:ext cx="3527450" cy="168656"/>
           </a:xfrm>
           <a:prstGeom prst="rect">
@@ -9130,7 +9140,7 @@
         </p:nvSpPr>
         <p:spPr>
           <a:xfrm>
-            <a:off x="8133892" y="4179316"/>
+            <a:off x="8133892" y="4438396"/>
             <a:ext cx="3527450" cy="193421"/>
           </a:xfrm>
           <a:prstGeom prst="rect">
@@ -9165,7 +9175,7 @@
         </p:nvSpPr>
         <p:spPr>
           <a:xfrm>
-            <a:off x="8133892" y="4431792"/>
+            <a:off x="8133892" y="4690872"/>
             <a:ext cx="3527450" cy="10972"/>
           </a:xfrm>
           <a:prstGeom prst="rect">
@@ -11095,7 +11105,7 @@
                 </a:solidFill>
                 <a:latin typeface="Calibri"/>
               </a:rPr>
-              <a:t>Week 1 Day 5: the week rebuilt alone</a:t>
+              <a:t>Week 1, Day 5. The note, defended aloud</a:t>
             </a:r>
           </a:p>
         </p:txBody>
@@ -11371,14 +11381,14 @@
                 </a:solidFill>
                 <a:latin typeface="Calibri"/>
               </a:rPr>
-              <a:t>Five on the method, two design calls and Thursday's return question, ungraded.</a:t>
+              <a:t>Three on the method, four design calls and Thursday's return question, ungraded.</a:t>
             </a:r>
           </a:p>
         </p:txBody>
       </p:sp>
       <p:pic>
         <p:nvPicPr>
-          <p:cNvPr id="9" name="mermaid diagram" descr="11a77ed4f1c2fc56.png"/>
+          <p:cNvPr id="9" name="mermaid diagram" descr="c5810a2e86732992.png"/>
           <p:cNvPicPr>
             <a:picLocks noChangeAspect="1"/>
           </p:cNvPicPr>
@@ -11392,8 +11402,8 @@
         </p:blipFill>
         <p:spPr>
           <a:xfrm>
-            <a:off x="1466697" y="1956816"/>
-            <a:ext cx="9258300" cy="1628775"/>
+            <a:off x="1888178" y="1956816"/>
+            <a:ext cx="8415337" cy="1628775"/>
           </a:xfrm>
           <a:prstGeom prst="rect">
             <a:avLst/>
@@ -13605,7 +13615,7 @@
                 </a:solidFill>
                 <a:latin typeface="Calibri"/>
               </a:rPr>
-              <a:t>Shuffle what belongs together, which this week is the customer.</a:t>
+              <a:t>Keep each customer's own two quarters together in every shuffle.</a:t>
             </a:r>
           </a:p>
         </p:txBody>
@@ -15779,7 +15789,7 @@
                 </a:solidFill>
                 <a:latin typeface="Calibri"/>
               </a:rPr>
-              <a:t>Week 1 Day 5: the week rebuilt alone</a:t>
+              <a:t>Week 1, Day 5. The note, defended aloud</a:t>
             </a:r>
           </a:p>
         </p:txBody>
@@ -20539,7 +20549,7 @@
       </p:sp>
       <p:pic>
         <p:nvPicPr>
-          <p:cNvPr id="9" name="mermaid diagram" descr="979168cf41283807.png"/>
+          <p:cNvPr id="9" name="mermaid diagram" descr="ea3b488851d317b9.png"/>
           <p:cNvPicPr>
             <a:picLocks noChangeAspect="1"/>
           </p:cNvPicPr>
@@ -20553,8 +20563,8 @@
         </p:blipFill>
         <p:spPr>
           <a:xfrm>
-            <a:off x="1759591" y="1956816"/>
-            <a:ext cx="8672512" cy="1128712"/>
+            <a:off x="1123797" y="1956816"/>
+            <a:ext cx="9944100" cy="1128712"/>
           </a:xfrm>
           <a:prstGeom prst="rect">
             <a:avLst/>
@@ -20595,7 +20605,7 @@
                 </a:solidFill>
                 <a:latin typeface="Calibri"/>
               </a:rPr>
-              <a:t>In pair one each twelve minutes runs: two minutes of the note read aloud, six of pushes and answers, four for the partner to fill the feedback card. Pair two takes ten: two, five and three.</a:t>
+              <a:t>In pair one each ten minutes runs: two minutes of the note read aloud, five of pushes and answers, three for the partner to fill the feedback card. Pair two takes nine: two, four and three.</a:t>
             </a:r>
           </a:p>
         </p:txBody>

--- a/content/W01/D5/slides/C2_W01_D05_rehearsal_STUDENT.pptx
+++ b/content/W01/D5/slides/C2_W01_D05_rehearsal_STUDENT.pptx
@@ -623,7 +623,7 @@
           </a:p>
           <a:p>
             <a:r>
-              <a:t>for them. Never aloud, never to a group.</a:t>
+              <a:t>for them, never aloud and never to a group.</a:t>
             </a:r>
           </a:p>
         </p:txBody>
@@ -13571,7 +13571,7 @@
         <p:spPr>
           <a:xfrm>
             <a:off x="530352" y="4061968"/>
-            <a:ext cx="11130991" cy="1121664"/>
+            <a:ext cx="11130991" cy="1639824"/>
           </a:xfrm>
           <a:prstGeom prst="roundRect">
             <a:avLst>
@@ -13624,7 +13624,7 @@
         </p:nvSpPr>
         <p:spPr>
           <a:xfrm>
-            <a:off x="758952" y="4394200"/>
+            <a:off x="758952" y="4653280"/>
             <a:ext cx="457200" cy="457200"/>
           </a:xfrm>
           <a:prstGeom prst="ellipse">
@@ -13676,7 +13676,7 @@
         </p:blipFill>
         <p:spPr>
           <a:xfrm>
-            <a:off x="868680" y="4503928"/>
+            <a:off x="868680" y="4763008"/>
             <a:ext cx="237744" cy="237744"/>
           </a:xfrm>
           <a:prstGeom prst="rect">
@@ -13728,7 +13728,7 @@
         <p:spPr>
           <a:xfrm>
             <a:off x="1399031" y="4427728"/>
-            <a:ext cx="9987991" cy="682752"/>
+            <a:ext cx="9987991" cy="1200912"/>
           </a:xfrm>
           <a:prstGeom prst="rect">
             <a:avLst/>
@@ -13748,7 +13748,7 @@
                 </a:solidFill>
                 <a:latin typeface="Calibri"/>
               </a:rPr>
-              <a:t>B. Every plan fits the clock, so the call is which step to leave out. Switch to B with a test on the gap Meera will act on, trimming the tree; with no control total, say so in the first line.</a:t>
+              <a:t>B, because every plan fits the clock and the call is which step to leave out. When Meera will act on one segment's gap, add the test on that gap and trim the tree to find the minutes, or take C if she named the segment herself. With no control total, B still holds, and the first line says the read is unreconciled.</a:t>
             </a:r>
           </a:p>
         </p:txBody>
@@ -14261,7 +14261,7 @@
                 </a:solidFill>
                 <a:latin typeface="Calibri"/>
               </a:rPr>
-              <a:t>The migrated ERP's first quarter: zero rejects, and the dashboard Rs 20 lakh above Anand's books.</a:t>
+              <a:t>The migrated ERP's first quarter shows zero rejects and a dashboard Rs 20 lakh above Anand's books: which check runs first?</a:t>
             </a:r>
           </a:p>
         </p:txBody>
@@ -28888,7 +28888,7 @@
         <p:spPr>
           <a:xfrm>
             <a:off x="9216923" y="3303524"/>
-            <a:ext cx="2243251" cy="399796"/>
+            <a:ext cx="2243251" cy="581406"/>
           </a:xfrm>
           <a:prstGeom prst="rect">
             <a:avLst/>
@@ -28909,7 +28909,7 @@
                 </a:solidFill>
                 <a:latin typeface="Calibri"/>
               </a:rPr>
-              <a:t>Wants to know whether his tier is slipping and who to protect.</a:t>
+              <a:t>Wants to know whether the paid tier is slipping and whom to protect first.</a:t>
             </a:r>
           </a:p>
         </p:txBody>

--- a/content/W01/D5/slides/C2_W01_D05_rehearsal_STUDENT.pptx
+++ b/content/W01/D5/slides/C2_W01_D05_rehearsal_STUDENT.pptx
@@ -12500,7 +12500,7 @@
         <p:spPr>
           <a:xfrm>
             <a:off x="530352" y="2929128"/>
-            <a:ext cx="11130991" cy="1121664"/>
+            <a:ext cx="11130991" cy="1380744"/>
           </a:xfrm>
           <a:prstGeom prst="roundRect">
             <a:avLst>
@@ -12553,7 +12553,7 @@
         </p:nvSpPr>
         <p:spPr>
           <a:xfrm>
-            <a:off x="758952" y="3261360"/>
+            <a:off x="758952" y="3390900"/>
             <a:ext cx="457200" cy="457200"/>
           </a:xfrm>
           <a:prstGeom prst="ellipse">
@@ -12605,7 +12605,7 @@
         </p:blipFill>
         <p:spPr>
           <a:xfrm>
-            <a:off x="868680" y="3371088"/>
+            <a:off x="868680" y="3500628"/>
             <a:ext cx="237744" cy="237744"/>
           </a:xfrm>
           <a:prstGeom prst="rect">
@@ -12657,7 +12657,7 @@
         <p:spPr>
           <a:xfrm>
             <a:off x="1399031" y="3294888"/>
-            <a:ext cx="9987991" cy="682752"/>
+            <a:ext cx="9987991" cy="941832"/>
           </a:xfrm>
           <a:prstGeom prst="rect">
             <a:avLst/>
@@ -12677,7 +12677,7 @@
                 </a:solidFill>
                 <a:latin typeface="Calibri"/>
               </a:rPr>
-              <a:t>[F] You have two hours and a raw export; what do you do first, and what do you skip? DMart is the likeness: it puts out a provisional quarter days before it files the results.</a:t>
+              <a:t>[F] You have two hours and a raw export; what do you do first, and what do you skip? DMart is the likeness: its July to September 2025 revenue went out as a provisional update eight days before it filed the results.</a:t>
             </a:r>
           </a:p>
         </p:txBody>

--- a/content/W01/D5/slides/C2_W01_D05_rehearsal_STUDENT.pptx
+++ b/content/W01/D5/slides/C2_W01_D05_rehearsal_STUDENT.pptx
@@ -528,7 +528,7 @@
           <a:lstStyle/>
           <a:p>
             <a:r>
-              <a:t>LIVE, one minute. The afternoon, after the debrief's second half: the rehearsal in two rounds (100</a:t>
+              <a:t>LIVE, inside S1's half minute. The afternoon, after the debrief's second half: the rehearsal in two rounds (100</a:t>
             </a:r>
           </a:p>
           <a:p>
@@ -608,12 +608,12 @@
           <a:lstStyle/>
           <a:p>
             <a:r>
-              <a:t>LIVE, 50 minutes: S1 to S6 and S9 take eight, Marketing's sharpest push, modelled once with a TA,</a:t>
-            </a:r>
-          </a:p>
-          <a:p>
-            <a:r>
-              <a:t>takes four, and the pairs take the other 38. The TAs walk the room. Each TA also uses this round to</a:t>
+              <a:t>LIVE, 50 minutes: S1 to S6 and S9 take eight, Marketing's sharpest push, modelled once at S7 with a</a:t>
+            </a:r>
+          </a:p>
+          <a:p>
+            <a:r>
+              <a:t>TA, takes four, and the pairs take the other 38. The TAs walk the room. Each TA also uses this round to</a:t>
             </a:r>
           </a:p>
           <a:p>
@@ -923,7 +923,7 @@
           <a:lstStyle/>
           <a:p>
             <a:r>
-              <a:t>LIVE, 1 minute. Read who needs the answer and the three cases.</a:t>
+              <a:t>LIVE, half a minute. Read who needs the answer and the three cases.</a:t>
             </a:r>
           </a:p>
         </p:txBody>
@@ -993,7 +993,7 @@
           <a:lstStyle/>
           <a:p>
             <a:r>
-              <a:t>LIVE, 1 minute. The prompts are in exercises/unguided/C2_W01_D05_timed_cases_STUDENT.md. The model</a:t>
+              <a:t>LIVE, half a minute. The prompts are in exercises/unguided/C2_W01_D05_timed_cases_STUDENT.md. The model</a:t>
             </a:r>
           </a:p>
           <a:p>
@@ -1958,7 +1958,7 @@
           <a:lstStyle/>
           <a:p>
             <a:r>
-              <a:t>LIVE, 4 minutes. Close on the three tasks. The practice set is in exercises/practice/ and the TAs</a:t>
+              <a:t>LIVE, 3 and a half minutes. Close on the three tasks. The practice set is in exercises/practice/ and the TAs</a:t>
             </a:r>
           </a:p>
           <a:p>
@@ -2178,7 +2178,7 @@
           <a:lstStyle/>
           <a:p>
             <a:r>
-              <a:t>LIVE, 2 minutes. Name the four and the one thing each listens for. The note being rehearsed is the</a:t>
+              <a:t>LIVE, 1 minute. Name the four and the one thing each listens for. The note being rehearsed is the</a:t>
             </a:r>
           </a:p>
           <a:p>
@@ -2348,12 +2348,12 @@
           </a:p>
           <a:p>
             <a:r>
-              <a:t>is the sharpest: the brief answers it in full, and after S7 a TA reads Marketing's lines while you</a:t>
-            </a:r>
-          </a:p>
-          <a:p>
-            <a:r>
-              <a:t>model the answer once, in four minutes. It is on neither pair list.</a:t>
+              <a:t>is the sharpest: the brief answers it in full on invented figures, and at S7 a TA reads Marketing's</a:t>
+            </a:r>
+          </a:p>
+          <a:p>
+            <a:r>
+              <a:t>lines while you model the answer once, in four minutes. It is on neither pair list.</a:t>
             </a:r>
           </a:p>
         </p:txBody>
@@ -2503,17 +2503,32 @@
           <a:lstStyle/>
           <a:p>
             <a:r>
-              <a:t>LIVE, 4 minutes: the modelled push. A TA reads Marketing's lines from the rehearsal brief, the</a:t>
-            </a:r>
-          </a:p>
-          <a:p>
-            <a:r>
-              <a:t>monsoon sale's two averages, and you answer once in the three moves, using the segment table the</a:t>
-            </a:r>
-          </a:p>
-          <a:p>
-            <a:r>
-              <a:t>brief prints. The brief carries the answer in full; this slide is its shape.</a:t>
+              <a:t>LIVE, 4 minutes: the modelled push. A TA reads Marketing's lines from the rehearsal brief, whose</a:t>
+            </a:r>
+          </a:p>
+          <a:p>
+            <a:r>
+              <a:t>invented averages are Rs 3,040 for the 60 customers who got the sale against Rs 2,900 for the 100</a:t>
+            </a:r>
+          </a:p>
+          <a:p>
+            <a:r>
+              <a:t>who did not, and you answer once in the three moves from the brief's invented segment table:</a:t>
+            </a:r>
+          </a:p>
+          <a:p>
+            <a:r>
+              <a:t>members Rs 3,990 against Rs 4,200 and Retail-Core Rs 2,090 against Rs 2,200, 5.0 percent less in</a:t>
+            </a:r>
+          </a:p>
+          <a:p>
+            <a:r>
+              <a:t>each. Say once that the figures are invented and that each defender's note carries Thursday's real</a:t>
+            </a:r>
+          </a:p>
+          <a:p>
+            <a:r>
+              <a:t>ones, which the same answer fits. The brief carries the answer in full; this slide is its shape.</a:t>
             </a:r>
           </a:p>
         </p:txBody>
@@ -7387,7 +7402,7 @@
                 </a:solidFill>
                 <a:latin typeface="Calibri"/>
               </a:rPr>
-              <a:t>Said before the push, after it, or not at all?</a:t>
+              <a:t>Was it said before the push, after it, or not at all?</a:t>
             </a:r>
           </a:p>
         </p:txBody>
@@ -7841,7 +7856,7 @@
                 </a:solidFill>
                 <a:latin typeface="Calibri"/>
               </a:rPr>
-              <a:t>One sentence to keep, one to cut.</a:t>
+              <a:t>Name one sentence to keep and one to cut.</a:t>
             </a:r>
           </a:p>
         </p:txBody>
@@ -9480,7 +9495,7 @@
                 </a:solidFill>
                 <a:latin typeface="Calibri"/>
               </a:rPr>
-              <a:t>Who needs this answer, and which cases lead to it?</a:t>
+              <a:t>Who acts on the approach you pick, and which three cases test it?</a:t>
             </a:r>
           </a:p>
         </p:txBody>
@@ -9864,7 +9879,7 @@
                 </a:solidFill>
                 <a:latin typeface="Calibri"/>
               </a:rPr>
-              <a:t>Meera's first read in two hours.</a:t>
+              <a:t>Meera wants a first read in two hours.</a:t>
             </a:r>
           </a:p>
         </p:txBody>
@@ -10067,7 +10082,7 @@
                 </a:solidFill>
                 <a:latin typeface="Calibri"/>
               </a:rPr>
-              <a:t>Zero rejects and a Rs 20 lakh gap.</a:t>
+              <a:t>Zero rejects meet a Rs 20 lakh gap.</a:t>
             </a:r>
           </a:p>
         </p:txBody>
@@ -10241,7 +10256,7 @@
                 </a:solidFill>
                 <a:latin typeface="Calibri"/>
               </a:rPr>
-              <a:t>Can 12 visits beat 1,200?</a:t>
+              <a:t>Can 5 of 12 beat 31 percent?</a:t>
             </a:r>
           </a:p>
         </p:txBody>
@@ -10276,7 +10291,7 @@
                 </a:solidFill>
                 <a:latin typeface="Calibri"/>
               </a:rPr>
-              <a:t>42 percent on twelve visits.</a:t>
+              <a:t>The product head wants to ship on 42 percent.</a:t>
             </a:r>
           </a:p>
         </p:txBody>
@@ -11036,7 +11051,7 @@
                 </a:solidFill>
                 <a:latin typeface="Calibri"/>
               </a:rPr>
-              <a:t>The case, its options and the real company it is like.</a:t>
+              <a:t>Read the case, its options and the real company it is like.</a:t>
             </a:r>
           </a:p>
         </p:txBody>
@@ -11239,7 +11254,7 @@
                 </a:solidFill>
                 <a:latin typeface="Calibri"/>
               </a:rPr>
-              <a:t>On paper: which option fits, sized how, and what would switch it.</a:t>
+              <a:t>On paper, pick an option, size it, and name what would switch it.</a:t>
             </a:r>
           </a:p>
         </p:txBody>
@@ -11421,7 +11436,7 @@
         <p:spPr>
           <a:xfrm>
             <a:off x="6351879" y="3277870"/>
-            <a:ext cx="2316403" cy="201676"/>
+            <a:ext cx="2316403" cy="366776"/>
           </a:xfrm>
           <a:prstGeom prst="rect">
             <a:avLst/>
@@ -11442,7 +11457,7 @@
                 </a:solidFill>
                 <a:latin typeface="Calibri"/>
               </a:rPr>
-              <a:t>Two minutes each, to your partner.</a:t>
+              <a:t>Each of you answers your partner for two minutes.</a:t>
             </a:r>
           </a:p>
         </p:txBody>
@@ -11645,7 +11660,7 @@
                 </a:solidFill>
                 <a:latin typeface="Calibri"/>
               </a:rPr>
-              <a:t>Two answers to the room, then the model answer.</a:t>
+              <a:t>Two answers go to the room, then the model answer.</a:t>
             </a:r>
           </a:p>
         </p:txBody>
@@ -12363,7 +12378,7 @@
         <p:spPr>
           <a:xfrm>
             <a:off x="530352" y="1956816"/>
-            <a:ext cx="11130991" cy="807720"/>
+            <a:ext cx="11130991" cy="1074420"/>
           </a:xfrm>
           <a:prstGeom prst="roundRect">
             <a:avLst>
@@ -12411,7 +12426,7 @@
         <p:spPr>
           <a:xfrm>
             <a:off x="676656" y="2084832"/>
-            <a:ext cx="45720" cy="551688"/>
+            <a:ext cx="45720" cy="818388"/>
           </a:xfrm>
           <a:prstGeom prst="roundRect">
             <a:avLst>
@@ -12457,7 +12472,7 @@
         <p:spPr>
           <a:xfrm>
             <a:off x="877824" y="2075688"/>
-            <a:ext cx="10564063" cy="624840"/>
+            <a:ext cx="10564063" cy="891540"/>
           </a:xfrm>
           <a:prstGeom prst="rect">
             <a:avLst/>
@@ -12486,7 +12501,7 @@
                 </a:solidFill>
                 <a:latin typeface="Calibri"/>
               </a:rPr>
-              <a:t>Each plan fits the clock at the lab's pace. Choose one: a) no reconciliation; b) no test, the note marked provisional; c) the tree and a test for one segment only; d) no profile, straight to cleaning.</a:t>
+              <a:t>Each plan fits the clock at the lab's pace. Choose one: a) no reconciliation; b) no test, the note marked provisional; c) no tree: one segment's gap tested, with the note on that segment; d) no profile, straight to cleaning.</a:t>
             </a:r>
           </a:p>
         </p:txBody>
@@ -12499,7 +12514,7 @@
         </p:nvSpPr>
         <p:spPr>
           <a:xfrm>
-            <a:off x="530352" y="2929128"/>
+            <a:off x="530352" y="3195828"/>
             <a:ext cx="11130991" cy="1380744"/>
           </a:xfrm>
           <a:prstGeom prst="roundRect">
@@ -12553,7 +12568,7 @@
         </p:nvSpPr>
         <p:spPr>
           <a:xfrm>
-            <a:off x="758952" y="3390900"/>
+            <a:off x="758952" y="3657600"/>
             <a:ext cx="457200" cy="457200"/>
           </a:xfrm>
           <a:prstGeom prst="ellipse">
@@ -12605,7 +12620,7 @@
         </p:blipFill>
         <p:spPr>
           <a:xfrm>
-            <a:off x="868680" y="3500628"/>
+            <a:off x="868680" y="3767328"/>
             <a:ext cx="237744" cy="237744"/>
           </a:xfrm>
           <a:prstGeom prst="rect">
@@ -12621,7 +12636,7 @@
         </p:nvSpPr>
         <p:spPr>
           <a:xfrm>
-            <a:off x="1399031" y="3075432"/>
+            <a:off x="1399031" y="3342132"/>
             <a:ext cx="9987991" cy="160401"/>
           </a:xfrm>
           <a:prstGeom prst="rect">
@@ -12656,7 +12671,7 @@
         </p:nvSpPr>
         <p:spPr>
           <a:xfrm>
-            <a:off x="1399031" y="3294888"/>
+            <a:off x="1399031" y="3561588"/>
             <a:ext cx="9987991" cy="941832"/>
           </a:xfrm>
           <a:prstGeom prst="rect">
@@ -13155,7 +13170,7 @@
                 </a:solidFill>
                 <a:latin typeface="Georgia"/>
               </a:rPr>
-              <a:t>Answer: leave out the test, never the reconciliation</a:t>
+              <a:t>Answer: keep the reconciliation, leave out the test</a:t>
             </a:r>
           </a:p>
         </p:txBody>
@@ -13479,7 +13494,7 @@
                           </a:solidFill>
                           <a:latin typeface="Calibri"/>
                         </a:rPr>
-                        <a:t>Every segment but one</a:t>
+                        <a:t>The tree: one segment's gap is tested with no decomposition</a:t>
                       </a:r>
                     </a:p>
                   </a:txBody>
@@ -14398,7 +14413,7 @@
                 </a:solidFill>
                 <a:latin typeface="Calibri"/>
               </a:rPr>
-              <a:t>About 50,000 rows. Choose the order: a) the ledger match first, since it names every order; b) ids against rows and the value accounting, then a monthly bridge; c) the monthly bridge first, then ids against rows; d) the dashboard's own query, since it ran for years.</a:t>
+              <a:t>About 50,000 rows. Choose the order: a) the ledger match first, since it names every order; b) ids against rows and the value accounting, then a monthly bridge; c) the monthly bridge first, then ids against rows once the gap is sized; d) the dashboard's own query first, since the dashboard has run for years.</a:t>
             </a:r>
           </a:p>
         </p:txBody>
@@ -14412,7 +14427,7 @@
         <p:spPr>
           <a:xfrm>
             <a:off x="530352" y="3195828"/>
-            <a:ext cx="11130991" cy="1121664"/>
+            <a:ext cx="11130991" cy="1380744"/>
           </a:xfrm>
           <a:prstGeom prst="roundRect">
             <a:avLst>
@@ -14465,7 +14480,7 @@
         </p:nvSpPr>
         <p:spPr>
           <a:xfrm>
-            <a:off x="758952" y="3528060"/>
+            <a:off x="758952" y="3657600"/>
             <a:ext cx="457200" cy="457200"/>
           </a:xfrm>
           <a:prstGeom prst="ellipse">
@@ -14517,7 +14532,7 @@
         </p:blipFill>
         <p:spPr>
           <a:xfrm>
-            <a:off x="868680" y="3637788"/>
+            <a:off x="868680" y="3767328"/>
             <a:ext cx="237744" cy="237744"/>
           </a:xfrm>
           <a:prstGeom prst="rect">
@@ -14569,7 +14584,7 @@
         <p:spPr>
           <a:xfrm>
             <a:off x="1399031" y="3561588"/>
-            <a:ext cx="9987991" cy="682752"/>
+            <a:ext cx="9987991" cy="941832"/>
           </a:xfrm>
           <a:prstGeom prst="rect">
             <a:avLst/>
@@ -14589,7 +14604,7 @@
                 </a:solidFill>
                 <a:latin typeface="Calibri"/>
               </a:rPr>
-              <a:t>[S] Walk me through how you clean and check a dataset you have never seen. TSB is a loose likeness: a new platform whose output was trusted before it was checked.</a:t>
+              <a:t>[S] Walk me through how you clean and check a dataset you have never seen. TSB is a loose likeness: its customers were locked out of a new platform, where this case is a total trusted before it was reconciled.</a:t>
             </a:r>
           </a:p>
         </p:txBody>
@@ -16173,7 +16188,7 @@
                 </a:solidFill>
                 <a:latin typeface="Calibri"/>
               </a:rPr>
-              <a:t>Does your note hold when Marketing pushes, and what do you do when the clock runs?</a:t>
+              <a:t>Does your note hold when Marketing pushes, which approach fits each case, and what is yours now?</a:t>
             </a:r>
           </a:p>
         </p:txBody>
@@ -16420,7 +16435,7 @@
                 </a:solidFill>
                 <a:latin typeface="Calibri"/>
               </a:rPr>
-              <a:t>Thursday's note, defended in pairs and then to the room.</a:t>
+              <a:t>You defend Thursday's note in pairs, then to the room.</a:t>
             </a:r>
           </a:p>
         </p:txBody>
@@ -16623,7 +16638,7 @@
                 </a:solidFill>
                 <a:latin typeface="Calibri"/>
               </a:rPr>
-              <a:t>Three timed design cases, answered aloud.</a:t>
+              <a:t>You answer three timed design cases aloud.</a:t>
             </a:r>
           </a:p>
         </p:txBody>
@@ -16811,7 +16826,7 @@
         <p:spPr>
           <a:xfrm>
             <a:off x="8237524" y="3277870"/>
-            <a:ext cx="3259226" cy="201676"/>
+            <a:ext cx="3259226" cy="366776"/>
           </a:xfrm>
           <a:prstGeom prst="rect">
             <a:avLst/>
@@ -16832,7 +16847,7 @@
                 </a:solidFill>
                 <a:latin typeface="Calibri"/>
               </a:rPr>
-              <a:t>The Kahoot, Saturday's paper and tonight's rerun.</a:t>
+              <a:t>The Kahoot, Saturday's paper and tonight's rerun close the week.</a:t>
             </a:r>
           </a:p>
         </p:txBody>
@@ -17482,7 +17497,7 @@
                 </a:solidFill>
                 <a:latin typeface="Calibri"/>
               </a:rPr>
-              <a:t>Choose one: a) ship to everyone now; b) keep the pilot small and wait, at about 12 visits a week; c) split the traffic in half until each checkout has about 300 visits; d) one visit in ten to the new checkout for a fortnight.</a:t>
+              <a:t>Choose one: a) ship to everyone now, on the 42 percent; b) keep the pilot small and wait for more weeks, at about 12 visits a week; c) split the traffic in half until each checkout has about 300 visits; d) one visit in ten to the new checkout for a fortnight, as a cautious rollout.</a:t>
             </a:r>
           </a:p>
         </p:txBody>
@@ -19848,7 +19863,7 @@
                 </a:solidFill>
                 <a:latin typeface="Calibri"/>
               </a:rPr>
-              <a:t>Who needs this answer, and which smaller questions lead to it?</a:t>
+              <a:t>Who will test the week's lines, and which four questions lead to tonight's rerun?</a:t>
             </a:r>
           </a:p>
         </p:txBody>
@@ -20122,7 +20137,7 @@
         <p:spPr>
           <a:xfrm>
             <a:off x="530352" y="3816096"/>
-            <a:ext cx="2645587" cy="904240"/>
+            <a:ext cx="2645587" cy="1076960"/>
           </a:xfrm>
           <a:prstGeom prst="roundRect">
             <a:avLst>
@@ -20232,7 +20247,7 @@
                 </a:solidFill>
                 <a:latin typeface="Calibri"/>
               </a:rPr>
-              <a:t>The Kahoot, eight items.</a:t>
+              <a:t>The Kahoot tests it in eight items.</a:t>
             </a:r>
           </a:p>
         </p:txBody>
@@ -20325,7 +20340,7 @@
         <p:spPr>
           <a:xfrm>
             <a:off x="3358819" y="3816096"/>
-            <a:ext cx="2645587" cy="904240"/>
+            <a:ext cx="2645587" cy="1076960"/>
           </a:xfrm>
           <a:prstGeom prst="roundRect">
             <a:avLst>
@@ -20414,7 +20429,7 @@
         <p:spPr>
           <a:xfrm>
             <a:off x="3523411" y="4250182"/>
-            <a:ext cx="2316403" cy="201676"/>
+            <a:ext cx="2316403" cy="366776"/>
           </a:xfrm>
           <a:prstGeom prst="rect">
             <a:avLst/>
@@ -20435,7 +20450,7 @@
                 </a:solidFill>
                 <a:latin typeface="Calibri"/>
               </a:rPr>
-              <a:t>The paper's format.</a:t>
+              <a:t>You hear the paper's format and marking.</a:t>
             </a:r>
           </a:p>
         </p:txBody>
@@ -20528,7 +20543,7 @@
         <p:spPr>
           <a:xfrm>
             <a:off x="6187287" y="3816096"/>
-            <a:ext cx="2645587" cy="904240"/>
+            <a:ext cx="2645587" cy="1076960"/>
           </a:xfrm>
           <a:prstGeom prst="roundRect">
             <a:avLst>
@@ -20617,7 +20632,7 @@
         <p:spPr>
           <a:xfrm>
             <a:off x="6351879" y="4250182"/>
-            <a:ext cx="2316403" cy="201676"/>
+            <a:ext cx="2316403" cy="366776"/>
           </a:xfrm>
           <a:prstGeom prst="rect">
             <a:avLst/>
@@ -20638,7 +20653,7 @@
                 </a:solidFill>
                 <a:latin typeface="Calibri"/>
               </a:rPr>
-              <a:t>Five, one per step.</a:t>
+              <a:t>Five lines, one per step, close the week.</a:t>
             </a:r>
           </a:p>
         </p:txBody>
@@ -20731,7 +20746,7 @@
         <p:spPr>
           <a:xfrm>
             <a:off x="9015755" y="3816096"/>
-            <a:ext cx="2645587" cy="904240"/>
+            <a:ext cx="2645587" cy="1076960"/>
           </a:xfrm>
           <a:prstGeom prst="roundRect">
             <a:avLst>
@@ -20826,7 +20841,7 @@
         <p:spPr>
           <a:xfrm>
             <a:off x="9180347" y="4250182"/>
-            <a:ext cx="2316403" cy="201676"/>
+            <a:ext cx="2316403" cy="366776"/>
           </a:xfrm>
           <a:prstGeom prst="rect">
             <a:avLst/>
@@ -20847,7 +20862,7 @@
                 </a:solidFill>
                 <a:latin typeface="Calibri"/>
               </a:rPr>
-              <a:t>Tonight's three tasks.</a:t>
+              <a:t>Tonight has three tasks, and one is a rerun.</a:t>
             </a:r>
           </a:p>
         </p:txBody>
@@ -21423,7 +21438,7 @@
                 </a:solidFill>
                 <a:latin typeface="Calibri"/>
               </a:rPr>
-              <a:t>Three items on the method, four design calls and Thursday's return question, ungraded.</a:t>
+              <a:t>The Kahoot is ungraded: three items on the method, four design calls and Thursday's return question.</a:t>
             </a:r>
           </a:p>
         </p:txBody>
@@ -22163,7 +22178,7 @@
                 </a:solidFill>
                 <a:latin typeface="Calibri"/>
               </a:rPr>
-              <a:t>Blanks from a word bank, pairs from a match table, statements judged with their reason, scenario sets, applied maths and ordering.</a:t>
+              <a:t>It mixes blanks from a word bank, pairs from a match table, statements judged with their reason, scenario sets, applied maths and ordering.</a:t>
             </a:r>
           </a:p>
         </p:txBody>
@@ -22596,7 +22611,7 @@
         <p:spPr>
           <a:xfrm>
             <a:off x="6388455" y="3303524"/>
-            <a:ext cx="2243251" cy="581406"/>
+            <a:ext cx="2243251" cy="763016"/>
           </a:xfrm>
           <a:prstGeom prst="rect">
             <a:avLst/>
@@ -22617,7 +22632,7 @@
                 </a:solidFill>
                 <a:latin typeface="Calibri"/>
               </a:rPr>
-              <a:t>The most-missed items first, then the week's interview questions as interview answers.</a:t>
+              <a:t>The most-missed items are discussed first, then the week's interview questions are answered aloud.</a:t>
             </a:r>
           </a:p>
         </p:txBody>
@@ -22823,7 +22838,7 @@
         <p:spPr>
           <a:xfrm>
             <a:off x="9216923" y="3303524"/>
-            <a:ext cx="2243251" cy="399796"/>
+            <a:ext cx="2243251" cy="581406"/>
           </a:xfrm>
           <a:prstGeom prst="rect">
             <a:avLst/>
@@ -22844,7 +22859,7 @@
                 </a:solidFill>
                 <a:latin typeface="Calibri"/>
               </a:rPr>
-              <a:t>A performance indicator for you and the team, with no ranking.</a:t>
+              <a:t>It is a performance indicator for you and the team, with no ranking.</a:t>
             </a:r>
           </a:p>
         </p:txBody>
@@ -24462,7 +24477,7 @@
                 </a:solidFill>
                 <a:latin typeface="Calibri"/>
               </a:rPr>
-              <a:t>The step the TA marked, on the practice export, with one line on what you will do differently.</a:t>
+              <a:t>Run the step the TA marked on the practice export, and write one line on what you will change.</a:t>
             </a:r>
           </a:p>
         </p:txBody>
@@ -24665,7 +24680,7 @@
                 </a:solidFill>
                 <a:latin typeface="Calibri"/>
               </a:rPr>
-              <a:t>The note's four parts and the p-value sentence; both are on Saturday's paper.</a:t>
+              <a:t>Write the note's four parts and the p-value sentence; both are on Saturday's paper.</a:t>
             </a:r>
           </a:p>
         </p:txBody>
@@ -24882,7 +24897,7 @@
         <p:spPr>
           <a:xfrm>
             <a:off x="530352" y="4103624"/>
-            <a:ext cx="11130991" cy="1121664"/>
+            <a:ext cx="11130991" cy="1639824"/>
           </a:xfrm>
           <a:prstGeom prst="roundRect">
             <a:avLst>
@@ -24935,7 +24950,7 @@
         </p:nvSpPr>
         <p:spPr>
           <a:xfrm>
-            <a:off x="758952" y="4435856"/>
+            <a:off x="758952" y="4694936"/>
             <a:ext cx="457200" cy="457200"/>
           </a:xfrm>
           <a:prstGeom prst="ellipse">
@@ -24987,7 +25002,7 @@
         </p:blipFill>
         <p:spPr>
           <a:xfrm>
-            <a:off x="868680" y="4545584"/>
+            <a:off x="868680" y="4804664"/>
             <a:ext cx="237744" cy="237744"/>
           </a:xfrm>
           <a:prstGeom prst="rect">
@@ -25039,7 +25054,7 @@
         <p:spPr>
           <a:xfrm>
             <a:off x="1399031" y="4469384"/>
-            <a:ext cx="9987991" cy="682752"/>
+            <a:ext cx="9987991" cy="1200912"/>
           </a:xfrm>
           <a:prstGeom prst="rect">
             <a:avLst/>
@@ -25059,7 +25074,7 @@
                 </a:solidFill>
                 <a:latin typeface="Calibri"/>
               </a:rPr>
-              <a:t>On Monday, Meera hears a note from someone who rebuilt every number in it alone this morning and reconciled it to Anand's books.</a:t>
+              <a:t>You have the method when its six steps, from the profile to the note, run in order under a clock and the note's caveat comes before the push, and tonight you rerun the one step the lab showed you do not own yet. On Monday, Meera hears Thursday's note from someone who ran the whole method alone this morning and held it against Marketing's pushes this afternoon.</a:t>
             </a:r>
           </a:p>
         </p:txBody>
@@ -26083,7 +26098,7 @@
                 </a:solidFill>
                 <a:latin typeface="Calibri"/>
               </a:rPr>
-              <a:t>Who needs this answer, and which smaller questions lead to it?</a:t>
+              <a:t>Who needs the note to hold, and which six questions test it?</a:t>
             </a:r>
           </a:p>
         </p:txBody>
@@ -26357,7 +26372,7 @@
         <p:spPr>
           <a:xfrm>
             <a:off x="530352" y="3816096"/>
-            <a:ext cx="1702765" cy="1076960"/>
+            <a:ext cx="1702765" cy="1249680"/>
           </a:xfrm>
           <a:prstGeom prst="roundRect">
             <a:avLst>
@@ -26467,7 +26482,7 @@
                 </a:solidFill>
                 <a:latin typeface="Calibri"/>
               </a:rPr>
-              <a:t>Four people, four weaknesses.</a:t>
+              <a:t>Each of four listens for one weakness.</a:t>
             </a:r>
           </a:p>
         </p:txBody>
@@ -26560,7 +26575,7 @@
         <p:spPr>
           <a:xfrm>
             <a:off x="2415997" y="3816096"/>
-            <a:ext cx="1702765" cy="1076960"/>
+            <a:ext cx="1702765" cy="1249680"/>
           </a:xfrm>
           <a:prstGeom prst="roundRect">
             <a:avLst>
@@ -26670,7 +26685,7 @@
                 </a:solidFill>
                 <a:latin typeface="Calibri"/>
               </a:rPr>
-              <a:t>Four parts, one order.</a:t>
+              <a:t>Four parts run in one fixed order.</a:t>
             </a:r>
           </a:p>
         </p:txBody>
@@ -26763,7 +26778,7 @@
         <p:spPr>
           <a:xfrm>
             <a:off x="4301642" y="3816096"/>
-            <a:ext cx="1702765" cy="1076960"/>
+            <a:ext cx="1702765" cy="1249680"/>
           </a:xfrm>
           <a:prstGeom prst="roundRect">
             <a:avLst>
@@ -26852,7 +26867,7 @@
         <p:spPr>
           <a:xfrm>
             <a:off x="4466234" y="4464812"/>
-            <a:ext cx="1373581" cy="366776"/>
+            <a:ext cx="1373581" cy="531876"/>
           </a:xfrm>
           <a:prstGeom prst="rect">
             <a:avLst/>
@@ -26873,7 +26888,7 @@
                 </a:solidFill>
                 <a:latin typeface="Calibri"/>
               </a:rPr>
-              <a:t>Fair questions with motives.</a:t>
+              <a:t>Each push is a fair question with a motive.</a:t>
             </a:r>
           </a:p>
         </p:txBody>
@@ -26966,7 +26981,7 @@
         <p:spPr>
           <a:xfrm>
             <a:off x="6187287" y="3816096"/>
-            <a:ext cx="1702765" cy="1076960"/>
+            <a:ext cx="1702765" cy="1249680"/>
           </a:xfrm>
           <a:prstGeom prst="roundRect">
             <a:avLst>
@@ -27055,7 +27070,7 @@
         <p:spPr>
           <a:xfrm>
             <a:off x="6351879" y="4464812"/>
-            <a:ext cx="1373581" cy="366776"/>
+            <a:ext cx="1373581" cy="531876"/>
           </a:xfrm>
           <a:prstGeom prst="rect">
             <a:avLst/>
@@ -27076,7 +27091,7 @@
                 </a:solidFill>
                 <a:latin typeface="Calibri"/>
               </a:rPr>
-              <a:t>Restate, bound, offer the test.</a:t>
+              <a:t>Restate it, bound it, and offer the test.</a:t>
             </a:r>
           </a:p>
         </p:txBody>
@@ -27169,7 +27184,7 @@
         <p:spPr>
           <a:xfrm>
             <a:off x="8072932" y="3816096"/>
-            <a:ext cx="1702765" cy="1076960"/>
+            <a:ext cx="1702765" cy="1249680"/>
           </a:xfrm>
           <a:prstGeom prst="roundRect">
             <a:avLst>
@@ -27279,7 +27294,7 @@
                 </a:solidFill>
                 <a:latin typeface="Calibri"/>
               </a:rPr>
-              <a:t>Pairs, then the room.</a:t>
+              <a:t>You defend in pairs, then to the room.</a:t>
             </a:r>
           </a:p>
         </p:txBody>
@@ -27372,7 +27387,7 @@
         <p:spPr>
           <a:xfrm>
             <a:off x="9958578" y="3816096"/>
-            <a:ext cx="1702765" cy="1076960"/>
+            <a:ext cx="1702765" cy="1249680"/>
           </a:xfrm>
           <a:prstGeom prst="roundRect">
             <a:avLst>
@@ -27467,7 +27482,7 @@
         <p:spPr>
           <a:xfrm>
             <a:off x="10123170" y="4464812"/>
-            <a:ext cx="1373581" cy="366776"/>
+            <a:ext cx="1373581" cy="531876"/>
           </a:xfrm>
           <a:prstGeom prst="rect">
             <a:avLst/>
@@ -27488,7 +27503,7 @@
                 </a:solidFill>
                 <a:latin typeface="Calibri"/>
               </a:rPr>
-              <a:t>Four answers, no score.</a:t>
+              <a:t>The card holds four answers and no score.</a:t>
             </a:r>
           </a:p>
         </p:txBody>
@@ -28228,7 +28243,7 @@
                 </a:solidFill>
                 <a:latin typeface="Calibri"/>
               </a:rPr>
-              <a:t>One page, two minutes, and what to do. She acts on the first line.</a:t>
+              <a:t>She wants one page in two minutes that says what to do, and she acts on its first line.</a:t>
             </a:r>
           </a:p>
         </p:txBody>
@@ -28455,7 +28470,7 @@
                 </a:solidFill>
                 <a:latin typeface="Calibri"/>
               </a:rPr>
-              <a:t>Defends the monsoon sale and the acquisition budget against your reading.</a:t>
+              <a:t>The lead defends the monsoon sale and the acquisition budget against your reading.</a:t>
             </a:r>
           </a:p>
         </p:txBody>
@@ -28661,7 +28676,7 @@
         <p:spPr>
           <a:xfrm>
             <a:off x="6388455" y="3303524"/>
-            <a:ext cx="2243251" cy="399796"/>
+            <a:ext cx="2243251" cy="581406"/>
           </a:xfrm>
           <a:prstGeom prst="rect">
             <a:avLst/>
@@ -28682,7 +28697,7 @@
                 </a:solidFill>
                 <a:latin typeface="Calibri"/>
               </a:rPr>
-              <a:t>Checks that every number matches the books and can be audited.</a:t>
+              <a:t>He checks that every number matches the books and can be audited.</a:t>
             </a:r>
           </a:p>
         </p:txBody>
@@ -28909,7 +28924,7 @@
                 </a:solidFill>
                 <a:latin typeface="Calibri"/>
               </a:rPr>
-              <a:t>Wants to know whether the paid tier is slipping and whom to protect first.</a:t>
+              <a:t>He wants to know whether the paid tier is slipping and whom to protect first.</a:t>
             </a:r>
           </a:p>
         </p:txBody>
@@ -29866,7 +29881,7 @@
                 </a:solidFill>
                 <a:latin typeface="Calibri"/>
               </a:rPr>
-              <a:t>One sentence, with the number and what it is out of.</a:t>
+              <a:t>One sentence carries the number and what it is out of.</a:t>
             </a:r>
           </a:p>
         </p:txBody>
@@ -30069,7 +30084,7 @@
                 </a:solidFill>
                 <a:latin typeface="Calibri"/>
               </a:rPr>
-              <a:t>What you computed, on how many, and how you checked it.</a:t>
+              <a:t>Say what you computed, on how many, and how you checked it.</a:t>
             </a:r>
           </a:p>
         </p:txBody>
@@ -30272,7 +30287,7 @@
                 </a:solidFill>
                 <a:latin typeface="Calibri"/>
               </a:rPr>
-              <a:t>The thing that would change the claim, said before anyone finds it.</a:t>
+              <a:t>Name what would change the claim before anyone finds it.</a:t>
             </a:r>
           </a:p>
         </p:txBody>
@@ -30475,7 +30490,7 @@
                 </a:solidFill>
                 <a:latin typeface="Calibri"/>
               </a:rPr>
-              <a:t>What to do, what it costs, and what would tell us more.</a:t>
+              <a:t>Close on what to do, what it costs, and what would tell us more.</a:t>
             </a:r>
           </a:p>
         </p:txBody>
@@ -31186,7 +31201,7 @@
       </p:sp>
       <p:pic>
         <p:nvPicPr>
-          <p:cNvPr id="9" name="mermaid diagram" descr="d24cc5219b206799.png"/>
+          <p:cNvPr id="9" name="mermaid diagram" descr="0e0c703932e10c36.png"/>
           <p:cNvPicPr>
             <a:picLocks noChangeAspect="1"/>
           </p:cNvPicPr>
@@ -31200,8 +31215,8 @@
         </p:blipFill>
         <p:spPr>
           <a:xfrm>
-            <a:off x="1325273" y="1682496"/>
-            <a:ext cx="3196483" cy="4517136"/>
+            <a:off x="1273023" y="1682496"/>
+            <a:ext cx="3300984" cy="4517136"/>
           </a:xfrm>
           <a:prstGeom prst="rect">
             <a:avLst/>
@@ -32448,7 +32463,7 @@
                 </a:solidFill>
                 <a:latin typeface="Georgia"/>
               </a:rPr>
-              <a:t>The sharpest push agrees with the numbers first</a:t>
+              <a:t>The answer that holds agrees with the numbers first</a:t>
             </a:r>
           </a:p>
         </p:txBody>
@@ -32490,7 +32505,7 @@
       </p:sp>
       <p:pic>
         <p:nvPicPr>
-          <p:cNvPr id="9" name="mermaid diagram" descr="c239db21db2649f3.png"/>
+          <p:cNvPr id="9" name="mermaid diagram" descr="8b4a7a0b9515533a.png"/>
           <p:cNvPicPr>
             <a:picLocks noChangeAspect="1"/>
           </p:cNvPicPr>
@@ -32505,7 +32520,7 @@
         <p:spPr>
           <a:xfrm>
             <a:off x="780897" y="1956816"/>
-            <a:ext cx="10629900" cy="1857375"/>
+            <a:ext cx="10629900" cy="2100262"/>
           </a:xfrm>
           <a:prstGeom prst="rect">
             <a:avLst/>
@@ -32520,8 +32535,8 @@
         </p:nvSpPr>
         <p:spPr>
           <a:xfrm>
-            <a:off x="530352" y="3960495"/>
-            <a:ext cx="11130991" cy="772160"/>
+            <a:off x="530352" y="4203382"/>
+            <a:ext cx="11130991" cy="1048512"/>
           </a:xfrm>
           <a:prstGeom prst="rect">
             <a:avLst/>
@@ -32546,7 +32561,7 @@
                 </a:solidFill>
                 <a:latin typeface="Calibri"/>
               </a:rPr>
-              <a:t>Folding loses the finding and overclaiming loses the room; the answer that holds agrees with Marketing's arithmetic and then shows who the blend was made of.</a:t>
+              <a:t>On invented figures, the blend rises 4.8 percent because half the sale's customers were members who spend more anyway, against 35 percent of the rest, while inside each segment the sale's customers spent 5.0 percent less.</a:t>
             </a:r>
           </a:p>
         </p:txBody>

--- a/content/W01/D5/slides/C2_W01_D05_rehearsal_STUDENT.pptx
+++ b/content/W01/D5/slides/C2_W01_D05_rehearsal_STUDENT.pptx
@@ -21340,7 +21340,7 @@
                 </a:solidFill>
                 <a:latin typeface="Georgia"/>
               </a:rPr>
-              <a:t>Eight questions test the week's method</a:t>
+              <a:t>Eight ungraded questions show which calls wobble</a:t>
             </a:r>
           </a:p>
         </p:txBody>
@@ -21375,7 +21375,7 @@
                 </a:solidFill>
                 <a:latin typeface="Calibri"/>
               </a:rPr>
-              <a:t>Did the week's method stick, and which calls still wobble?</a:t>
+              <a:t>How will you find out which of the week's calls still wobble?</a:t>
             </a:r>
           </a:p>
         </p:txBody>

--- a/content/W01/D5/slides/C2_W01_D05_rehearsal_STUDENT.pptx
+++ b/content/W01/D5/slides/C2_W01_D05_rehearsal_STUDENT.pptx
@@ -618,12 +618,12 @@
           </a:p>
           <a:p>
             <a:r>
-              <a:t>tell each of their learners, quietly and one at a time, the step the lab's observation sheet marked</a:t>
-            </a:r>
-          </a:p>
-          <a:p>
-            <a:r>
-              <a:t>for them, never aloud and never to a group.</a:t>
+              <a:t>tell each of their learners, one at a time and out of the others' hearing, the step the lab's</a:t>
+            </a:r>
+          </a:p>
+          <a:p>
+            <a:r>
+              <a:t>observation sheet marked for them.</a:t>
             </a:r>
           </a:p>
         </p:txBody>
@@ -768,7 +768,7 @@
           <a:lstStyle/>
           <a:p>
             <a:r>
-              <a:t>LIVE, 50 minutes. Call names from a shuffled list, never by volunteering. The room's push comes</a:t>
+              <a:t>LIVE, 50 minutes. Call names from a shuffled list and take no volunteers. The room's push comes</a:t>
             </a:r>
           </a:p>
           <a:p>
@@ -1523,7 +1523,7 @@
           </a:p>
           <a:p>
             <a:r>
-              <a:t>arithmetic is in the trainer's key, for a TA asked, never for the room.</a:t>
+              <a:t>arithmetic is in the trainer's key for a TA who is asked, and the room hears only the size.</a:t>
             </a:r>
           </a:p>
         </p:txBody>

--- a/content/W01/D5/slides/C2_W01_D05_rehearsal_STUDENT.pptx
+++ b/content/W01/D5/slides/C2_W01_D05_rehearsal_STUDENT.pptx
@@ -1518,12 +1518,17 @@
           <a:lstStyle/>
           <a:p>
             <a:r>
-              <a:t>LIVE, 2 minutes, after the call-outs. D gathers more evidence than C in four times the time; the</a:t>
-            </a:r>
-          </a:p>
-          <a:p>
-            <a:r>
-              <a:t>arithmetic is in the trainer's key for a TA who is asked, and the room hears only the size.</a:t>
+              <a:t>LIVE, 2 minutes, after the call-outs. D gathers more evidence than C in four times the time, since</a:t>
+            </a:r>
+          </a:p>
+          <a:p>
+            <a:r>
+              <a:t>its 240 new-checkout visits beside 2,160 clear the 170 an uneven split needs; the arithmetic is in the</a:t>
+            </a:r>
+          </a:p>
+          <a:p>
+            <a:r>
+              <a:t>trainer's key for a TA who is asked, and the room hears only the two sizes.</a:t>
             </a:r>
           </a:p>
         </p:txBody>
@@ -18662,7 +18667,7 @@
         <p:spPr>
           <a:xfrm>
             <a:off x="530352" y="3419856"/>
-            <a:ext cx="11130991" cy="1121664"/>
+            <a:ext cx="11130991" cy="1380744"/>
           </a:xfrm>
           <a:prstGeom prst="roundRect">
             <a:avLst>
@@ -18715,7 +18720,7 @@
         </p:nvSpPr>
         <p:spPr>
           <a:xfrm>
-            <a:off x="758952" y="3752088"/>
+            <a:off x="758952" y="3881628"/>
             <a:ext cx="457200" cy="457200"/>
           </a:xfrm>
           <a:prstGeom prst="ellipse">
@@ -18767,7 +18772,7 @@
         </p:blipFill>
         <p:spPr>
           <a:xfrm>
-            <a:off x="868680" y="3861816"/>
+            <a:off x="868680" y="3991356"/>
             <a:ext cx="237744" cy="237744"/>
           </a:xfrm>
           <a:prstGeom prst="rect">
@@ -18819,7 +18824,7 @@
         <p:spPr>
           <a:xfrm>
             <a:off x="1399031" y="3785616"/>
-            <a:ext cx="9987991" cy="682752"/>
+            <a:ext cx="9987991" cy="941832"/>
           </a:xfrm>
           <a:prstGeom prst="rect">
             <a:avLst/>
@@ -18839,7 +18844,7 @@
                 </a:solidFill>
                 <a:latin typeface="Calibri"/>
               </a:rPr>
-              <a:t>c. Waiting at 12 visits a week takes about 14 weeks, and shipping now bets on five conversions. Switch to d, one visit in ten for a fortnight, when a worse checkout would lose money.</a:t>
+              <a:t>c. On an uneven split the new checkout needs about 170 visits beside the current one's thousands, so waiting at 12 visits a week takes about 14 weeks, and shipping now bets on five conversions. Switch to d, one visit in ten for a fortnight, when a worse checkout would lose money.</a:t>
             </a:r>
           </a:p>
         </p:txBody>
